--- a/_implementation-notes/evening-series/FotH Evening Session 9 Slides DRAFT v1.pptx
+++ b/_implementation-notes/evening-series/FotH Evening Session 9 Slides DRAFT v1.pptx
@@ -10,6 +10,7 @@
   <p:sldIdLst>
     <p:sldId id="256" r:id="rId2"/>
     <p:sldId id="284" r:id="rId115"/>
+    <p:sldId id="533" r:id="rId22"/>
     <p:sldId id="285" r:id="rId116"/>
     <p:sldId id="401" r:id="rId117"/>
     <p:sldId id="402" r:id="rId118"/>
@@ -18,7 +19,8 @@
     <p:sldId id="405" r:id="rId121"/>
     <p:sldId id="406" r:id="rId122"/>
     <p:sldId id="407" r:id="rId123"/>
-    <p:sldId id="532" r:id="rId124"/>
+    <p:sldId id="534" r:id="rId23"/>
+    <p:sldId id="535" r:id="rId24"/>
     <p:sldId id="408" r:id="rId125"/>
     <p:sldId id="409" r:id="rId126"/>
   </p:sldIdLst>
@@ -895,14 +897,17 @@
           <a:lstStyle/>
           <a:p>
             <a:r>
-              <a:rPr lang="en-US" sz="1200"/>
               <a:t>S9 · 7:00–7:08 · LEAD: CONTAINER HOLDER</a:t>
             </a:r>
           </a:p>
           <a:p>
             <a:r>
-              <a:rPr lang="en-US" sz="1200"/>
               <a:t>BEATS: 1. 'Welcome back. Find a seat.' Wait — take a longer breath than usual before the blessing. 2. Aaronic blessing. 3. Frame: today is quiet, mostly interior; deeply familiar for some, brand new for others — both are fine. 4. Container: what is said here stays here; nothing is required; listen to receive.</a:t>
+            </a:r>
+          </a:p>
+          <a:p>
+            <a:r>
+              <a:t>PAIR LEAD: name the leading pair in the welcome — two leaders hold tonight, and the room will see the evening handed back and forth between them; that is the design. The pair practices the session together beforehand.</a:t>
             </a:r>
           </a:p>
         </p:txBody>
@@ -1257,59 +1262,6 @@
 </p:notes>
 </file>
 
-<file path=ppt/notesSlides/notesSlide122.xml><?xml version="1.0" encoding="utf-8"?>
-<p:notes xmlns:a="http://schemas.openxmlformats.org/drawingml/2006/main" xmlns:r="http://schemas.openxmlformats.org/officeDocument/2006/relationships" xmlns:p="http://schemas.openxmlformats.org/presentationml/2006/main">
-  <p:cSld>
-    <p:spTree>
-      <p:nvGrpSpPr>
-        <p:cNvPr id="1" name=""/>
-        <p:cNvGrpSpPr/>
-        <p:nvPr/>
-      </p:nvGrpSpPr>
-      <p:grpSpPr>
-        <a:xfrm>
-          <a:off x="0" y="0"/>
-          <a:ext cx="0" cy="0"/>
-          <a:chOff x="0" y="0"/>
-          <a:chExt cx="0" cy="0"/>
-        </a:xfrm>
-      </p:grpSpPr>
-      <p:sp>
-        <p:nvSpPr>
-          <p:cNvPr id="2" name="Notes Placeholder 1"/>
-          <p:cNvSpPr>
-            <a:spLocks noGrp="1"/>
-          </p:cNvSpPr>
-          <p:nvPr>
-            <p:ph type="body" idx="1"/>
-          </p:nvPr>
-        </p:nvSpPr>
-        <p:spPr/>
-        <p:txBody>
-          <a:bodyPr/>
-          <a:lstStyle/>
-          <a:p>
-            <a:r>
-              <a:rPr lang="en-US" sz="1200"/>
-              <a:t>S9 · 8:20–8:24 · LEAD: CONTENT PRESENTER</a:t>
-            </a:r>
-          </a:p>
-          <a:p>
-            <a:r>
-              <a:rPr lang="en-US" sz="1200"/>
-              <a:t>BEATS: 1. Card home: morning question, evening note, daily PROAPT — plus three garden returns as one-time checks. 2. Be honest with the room: this is the most demanding between-session week of the series. Two visits is fine. One is fine. The practice is the turning toward, not the metric.</a:t>
-            </a:r>
-          </a:p>
-        </p:txBody>
-      </p:sp>
-    </p:spTree>
-  </p:cSld>
-  <p:clrMapOvr>
-    <a:masterClrMapping/>
-  </p:clrMapOvr>
-</p:notes>
-</file>
-
 <file path=ppt/notesSlides/notesSlide123.xml><?xml version="1.0" encoding="utf-8"?>
 <p:notes xmlns:a="http://schemas.openxmlformats.org/drawingml/2006/main" xmlns:r="http://schemas.openxmlformats.org/officeDocument/2006/relationships" xmlns:p="http://schemas.openxmlformats.org/presentationml/2006/main">
   <p:cSld>
@@ -1410,6 +1362,214 @@
             <a:r>
               <a:rPr lang="en-US" sz="1200"/>
               <a:t>CUES: Stay accessible for fifteen minutes after the close — today more than most, people will want to talk; the two-adult rule holds for any teen.</a:t>
+            </a:r>
+          </a:p>
+        </p:txBody>
+      </p:sp>
+    </p:spTree>
+  </p:cSld>
+  <p:clrMapOvr>
+    <a:masterClrMapping/>
+  </p:clrMapOvr>
+</p:notes>
+</file>
+
+<file path=ppt/notesSlides/notesSlide14.xml><?xml version="1.0" encoding="utf-8"?>
+<p:notes xmlns:a="http://schemas.openxmlformats.org/drawingml/2006/main" xmlns:p="http://schemas.openxmlformats.org/presentationml/2006/main" xmlns:r="http://schemas.openxmlformats.org/officeDocument/2006/relationships">
+  <p:cSld>
+    <p:spTree>
+      <p:nvGrpSpPr>
+        <p:cNvPr id="1" name=""/>
+        <p:cNvGrpSpPr/>
+        <p:nvPr/>
+      </p:nvGrpSpPr>
+      <p:grpSpPr>
+        <a:xfrm>
+          <a:off x="0" y="0"/>
+          <a:ext cx="0" cy="0"/>
+          <a:chOff x="0" y="0"/>
+          <a:chExt cx="0" cy="0"/>
+        </a:xfrm>
+      </p:grpSpPr>
+      <p:sp>
+        <p:nvSpPr>
+          <p:cNvPr id="2" name="Notes Placeholder 1"/>
+          <p:cNvSpPr>
+            <a:spLocks noGrp="1"/>
+          </p:cNvSpPr>
+          <p:nvPr>
+            <p:ph type="body" idx="1"/>
+          </p:nvPr>
+        </p:nvSpPr>
+        <p:spPr/>
+        <p:txBody>
+          <a:bodyPr/>
+          <a:lstStyle/>
+          <a:p>
+            <a:r>
+              <a:t>S9 · WELCOME · LEAD: CONTAINER HOLDER · GROUNDING — every session opens on this map</a:t>
+            </a:r>
+          </a:p>
+          <a:p>
+            <a:r>
+              <a:t>BEATS:</a:t>
+            </a:r>
+          </a:p>
+          <a:p>
+            <a:r>
+              <a:t>1. Locate tonight on the map, plainly: Session 9 stands in the third box — Connect with God. Each connection makes the next one real (Matt. 22:37–40).</a:t>
+            </a:r>
+          </a:p>
+          <a:p>
+            <a:r>
+              <a:t>2. The four boxes are one journey — each connection makes the next one real — rooted in the two great commandments: love God, love neighbor (Matt 22:37–40).</a:t>
+            </a:r>
+          </a:p>
+          <a:p>
+            <a:r>
+              <a:t>3. This is also the 'where we are on the map' minute the welcome owes any newcomer.</a:t>
+            </a:r>
+          </a:p>
+          <a:p>
+            <a:r>
+              <a:t>CUES: Two minutes at most; then tonight's road.</a:t>
+            </a:r>
+          </a:p>
+        </p:txBody>
+      </p:sp>
+    </p:spTree>
+  </p:cSld>
+  <p:clrMapOvr>
+    <a:masterClrMapping/>
+  </p:clrMapOvr>
+</p:notes>
+</file>
+
+<file path=ppt/notesSlides/notesSlide15.xml><?xml version="1.0" encoding="utf-8"?>
+<p:notes xmlns:a="http://schemas.openxmlformats.org/drawingml/2006/main" xmlns:p="http://schemas.openxmlformats.org/presentationml/2006/main" xmlns:r="http://schemas.openxmlformats.org/officeDocument/2006/relationships">
+  <p:cSld>
+    <p:spTree>
+      <p:nvGrpSpPr>
+        <p:cNvPr id="1" name=""/>
+        <p:cNvGrpSpPr/>
+        <p:nvPr/>
+      </p:nvGrpSpPr>
+      <p:grpSpPr>
+        <a:xfrm>
+          <a:off x="0" y="0"/>
+          <a:ext cx="0" cy="0"/>
+          <a:chOff x="0" y="0"/>
+          <a:chExt cx="0" cy="0"/>
+        </a:xfrm>
+      </p:grpSpPr>
+      <p:sp>
+        <p:nvSpPr>
+          <p:cNvPr id="2" name="Notes Placeholder 1"/>
+          <p:cNvSpPr>
+            <a:spLocks noGrp="1"/>
+          </p:cNvSpPr>
+          <p:nvPr>
+            <p:ph type="body" idx="1"/>
+          </p:nvPr>
+        </p:nvSpPr>
+        <p:spPr/>
+        <p:txBody>
+          <a:bodyPr/>
+          <a:lstStyle/>
+          <a:p>
+            <a:r>
+              <a:t>S9 · COMMISSIONING · LEAD: CONTENT PRESENTER</a:t>
+            </a:r>
+          </a:p>
+          <a:p>
+            <a:r>
+              <a:t>BEATS:</a:t>
+            </a:r>
+          </a:p>
+          <a:p>
+            <a:r>
+              <a:t>1. The sheet on the screen is the sheet in their hands — walk it, don't read it.</a:t>
+            </a:r>
+          </a:p>
+          <a:p>
+            <a:r>
+              <a:t>2. The standing rhythm first: the morning question, the evening journal line — one box per day on the week-grids.</a:t>
+            </a:r>
+          </a:p>
+          <a:p>
+            <a:r>
+              <a:t>3. A missed box is never a failure — it is an invitation to return.</a:t>
+            </a:r>
+          </a:p>
+          <a:p>
+            <a:r>
+              <a:t>CUES: The four parts are the next slide.</a:t>
+            </a:r>
+          </a:p>
+        </p:txBody>
+      </p:sp>
+    </p:spTree>
+  </p:cSld>
+  <p:clrMapOvr>
+    <a:masterClrMapping/>
+  </p:clrMapOvr>
+</p:notes>
+</file>
+
+<file path=ppt/notesSlides/notesSlide16.xml><?xml version="1.0" encoding="utf-8"?>
+<p:notes xmlns:a="http://schemas.openxmlformats.org/drawingml/2006/main" xmlns:p="http://schemas.openxmlformats.org/presentationml/2006/main" xmlns:r="http://schemas.openxmlformats.org/officeDocument/2006/relationships">
+  <p:cSld>
+    <p:spTree>
+      <p:nvGrpSpPr>
+        <p:cNvPr id="1" name=""/>
+        <p:cNvGrpSpPr/>
+        <p:nvPr/>
+      </p:nvGrpSpPr>
+      <p:grpSpPr>
+        <a:xfrm>
+          <a:off x="0" y="0"/>
+          <a:ext cx="0" cy="0"/>
+          <a:chOff x="0" y="0"/>
+          <a:chExt cx="0" cy="0"/>
+        </a:xfrm>
+      </p:grpSpPr>
+      <p:sp>
+        <p:nvSpPr>
+          <p:cNvPr id="2" name="Notes Placeholder 1"/>
+          <p:cNvSpPr>
+            <a:spLocks noGrp="1"/>
+          </p:cNvSpPr>
+          <p:nvPr>
+            <p:ph type="body" idx="1"/>
+          </p:nvPr>
+        </p:nvSpPr>
+        <p:spPr/>
+        <p:txBody>
+          <a:bodyPr/>
+          <a:lstStyle/>
+          <a:p>
+            <a:r>
+              <a:t>S9 · COMMISSIONING · LEAD: CONTENT PRESENTER</a:t>
+            </a:r>
+          </a:p>
+          <a:p>
+            <a:r>
+              <a:t>BEATS:</a:t>
+            </a:r>
+          </a:p>
+          <a:p>
+            <a:r>
+              <a:t>1. The four parts, in order: the homework practice, week one; the end-of-week-one check-in; the homework practice, week two; one sentence of preparation.</a:t>
+            </a:r>
+          </a:p>
+          <a:p>
+            <a:r>
+              <a:t>2. Check-in partners are named aloud before leaving this slide — the sheet has the line to write the name.</a:t>
+            </a:r>
+          </a:p>
+          <a:p>
+            <a:r>
+              <a:t>GUARD: The sheet-walk, not a re-teach.</a:t>
             </a:r>
           </a:p>
         </p:txBody>
@@ -4621,7 +4781,1671 @@
 </p:sld>
 </file>
 
-<file path=ppt/slides/slide114.xml><?xml version="1.0" encoding="utf-8"?>
+<file path=ppt/slides/slide10.xml><?xml version="1.0" encoding="utf-8"?>
+<p:sld xmlns:a="http://schemas.openxmlformats.org/drawingml/2006/main" xmlns:r="http://schemas.openxmlformats.org/officeDocument/2006/relationships" xmlns:p="http://schemas.openxmlformats.org/presentationml/2006/main">
+  <p:cSld>
+    <p:spTree>
+      <p:nvGrpSpPr>
+        <p:cNvPr id="1" name=""/>
+        <p:cNvGrpSpPr/>
+        <p:nvPr/>
+      </p:nvGrpSpPr>
+      <p:grpSpPr>
+        <a:xfrm>
+          <a:off x="0" y="0"/>
+          <a:ext cx="0" cy="0"/>
+          <a:chOff x="0" y="0"/>
+          <a:chExt cx="0" cy="0"/>
+        </a:xfrm>
+      </p:grpSpPr>
+      <p:sp>
+        <p:nvSpPr>
+          <p:cNvPr id="2" name="Rectangle 1"/>
+          <p:cNvSpPr/>
+          <p:nvPr/>
+        </p:nvSpPr>
+        <p:spPr>
+          <a:xfrm>
+            <a:off x="0" y="0"/>
+            <a:ext cx="12191695" cy="6858000"/>
+          </a:xfrm>
+          <a:prstGeom prst="rect">
+            <a:avLst/>
+          </a:prstGeom>
+          <a:solidFill>
+            <a:srgbClr val="FFFFFF"/>
+          </a:solidFill>
+          <a:ln>
+            <a:noFill/>
+          </a:ln>
+        </p:spPr>
+        <p:txBody>
+          <a:bodyPr/>
+          <a:lstStyle/>
+          <a:p>
+            <a:endParaRPr/>
+          </a:p>
+        </p:txBody>
+      </p:sp>
+      <p:sp>
+        <p:nvSpPr>
+          <p:cNvPr id="3" name="TextBox 2"/>
+          <p:cNvSpPr txBox="1"/>
+          <p:nvPr/>
+        </p:nvSpPr>
+        <p:spPr>
+          <a:xfrm>
+            <a:off x="822960" y="502920"/>
+            <a:ext cx="10515600" cy="822960"/>
+          </a:xfrm>
+          <a:prstGeom prst="rect">
+            <a:avLst/>
+          </a:prstGeom>
+          <a:noFill/>
+        </p:spPr>
+        <p:txBody>
+          <a:bodyPr wrap="square">
+            <a:spAutoFit/>
+          </a:bodyPr>
+          <a:lstStyle/>
+          <a:p>
+            <a:pPr algn="l">
+              <a:spcAft>
+                <a:spcPts val="600"/>
+              </a:spcAft>
+            </a:pPr>
+            <a:r>
+              <a:rPr sz="2800" b="1" i="0">
+                <a:solidFill>
+                  <a:srgbClr val="2C5F2D"/>
+                </a:solidFill>
+                <a:latin typeface="Cambria"/>
+              </a:rPr>
+              <a:t>Homework — Two Weeks, Four Parts</a:t>
+            </a:r>
+          </a:p>
+        </p:txBody>
+      </p:sp>
+      <p:sp>
+        <p:nvSpPr>
+          <p:cNvPr id="4" name="TextBox 4"/>
+          <p:cNvSpPr txBox="1"/>
+          <p:nvPr/>
+        </p:nvSpPr>
+        <p:spPr>
+          <a:xfrm>
+            <a:off x="822960" y="1554480"/>
+            <a:ext cx="6675120" cy="4892040"/>
+          </a:xfrm>
+          <a:prstGeom prst="rect">
+            <a:avLst/>
+          </a:prstGeom>
+          <a:noFill/>
+        </p:spPr>
+        <p:txBody>
+          <a:bodyPr wrap="square" lIns="91440" tIns="91440" rIns="91440" bIns="91440"/>
+          <a:lstStyle/>
+          <a:p>
+            <a:pPr marL="274320" indent="-274320">
+              <a:spcAft>
+                <a:spcPts val="750"/>
+              </a:spcAft>
+            </a:pPr>
+            <a:r>
+              <a:rPr sz="2000" b="1" i="0">
+                <a:solidFill>
+                  <a:srgbClr val="97BC62"/>
+                </a:solidFill>
+                <a:latin typeface="Calibri"/>
+              </a:rPr>
+              <a:t>•  </a:t>
+            </a:r>
+            <a:r>
+              <a:rPr sz="2000" b="0" i="0">
+                <a:solidFill>
+                  <a:srgbClr val="222B22"/>
+                </a:solidFill>
+                <a:latin typeface="Calibri"/>
+              </a:rPr>
+              <a:t>Three returns to the garden this week — five to ten minutes each, journaled</a:t>
+            </a:r>
+          </a:p>
+          <a:p>
+            <a:pPr marL="274320" indent="-274320">
+              <a:spcAft>
+                <a:spcPts val="750"/>
+              </a:spcAft>
+            </a:pPr>
+            <a:r>
+              <a:rPr sz="2000" b="1" i="0">
+                <a:solidFill>
+                  <a:srgbClr val="97BC62"/>
+                </a:solidFill>
+                <a:latin typeface="Calibri"/>
+              </a:rPr>
+              <a:t>•  </a:t>
+            </a:r>
+            <a:r>
+              <a:rPr sz="2000" b="0" i="0">
+                <a:solidFill>
+                  <a:srgbClr val="222B22"/>
+                </a:solidFill>
+                <a:latin typeface="Calibri"/>
+              </a:rPr>
+              <a:t>“You don’t need the full guided script — you have the place now. Just go back.”</a:t>
+            </a:r>
+          </a:p>
+          <a:p>
+            <a:pPr marL="274320" indent="-274320">
+              <a:spcAft>
+                <a:spcPts val="750"/>
+              </a:spcAft>
+            </a:pPr>
+            <a:r>
+              <a:rPr sz="2000" b="1" i="0">
+                <a:solidFill>
+                  <a:srgbClr val="97BC62"/>
+                </a:solidFill>
+                <a:latin typeface="Calibri"/>
+              </a:rPr>
+              <a:t>•  </a:t>
+            </a:r>
+            <a:r>
+              <a:rPr sz="2000" b="0" i="0">
+                <a:solidFill>
+                  <a:srgbClr val="222B22"/>
+                </a:solidFill>
+                <a:latin typeface="Calibri"/>
+              </a:rPr>
+              <a:t>Notice what is the same and what has changed — notice if Jesus is in a different place than He was tonight</a:t>
+            </a:r>
+          </a:p>
+          <a:p>
+            <a:pPr marL="274320" indent="-274320">
+              <a:spcAft>
+                <a:spcPts val="750"/>
+              </a:spcAft>
+            </a:pPr>
+            <a:r>
+              <a:rPr sz="2000" b="1" i="0">
+                <a:solidFill>
+                  <a:srgbClr val="97BC62"/>
+                </a:solidFill>
+                <a:latin typeface="Calibri"/>
+              </a:rPr>
+              <a:t>•  </a:t>
+            </a:r>
+            <a:r>
+              <a:rPr sz="2000" b="0" i="0">
+                <a:solidFill>
+                  <a:srgbClr val="222B22"/>
+                </a:solidFill>
+                <a:latin typeface="Calibri"/>
+              </a:rPr>
+              <a:t>Pick three days and a time — morning before the day starts is often best</a:t>
+            </a:r>
+          </a:p>
+          <a:p>
+            <a:pPr marL="274320" indent="-274320">
+              <a:spcAft>
+                <a:spcPts val="750"/>
+              </a:spcAft>
+            </a:pPr>
+            <a:r>
+              <a:rPr sz="2000" b="1" i="0">
+                <a:solidFill>
+                  <a:srgbClr val="97BC62"/>
+                </a:solidFill>
+                <a:latin typeface="Calibri"/>
+              </a:rPr>
+              <a:t>•  </a:t>
+            </a:r>
+            <a:r>
+              <a:rPr sz="2000" b="0" i="0">
+                <a:solidFill>
+                  <a:srgbClr val="222B22"/>
+                </a:solidFill>
+                <a:latin typeface="Calibri"/>
+              </a:rPr>
+              <a:t>If something heavy surfaces — stop, open your eyes, come back another day; tell a trusted adult</a:t>
+            </a:r>
+          </a:p>
+          <a:p>
+            <a:pPr marL="274320" indent="-274320">
+              <a:spcAft>
+                <a:spcPts val="750"/>
+              </a:spcAft>
+            </a:pPr>
+            <a:r>
+              <a:rPr sz="2000" b="1" i="0">
+                <a:solidFill>
+                  <a:srgbClr val="97BC62"/>
+                </a:solidFill>
+                <a:latin typeface="Calibri"/>
+              </a:rPr>
+              <a:t>•  </a:t>
+            </a:r>
+            <a:r>
+              <a:rPr sz="2000" b="0" i="0">
+                <a:solidFill>
+                  <a:srgbClr val="222B22"/>
+                </a:solidFill>
+                <a:latin typeface="Calibri"/>
+              </a:rPr>
+              <a:t>Came in skeptical? The Note for the Skeptic handout is for you — adapting or sitting out for now is okay</a:t>
+            </a:r>
+          </a:p>
+        </p:txBody>
+      </p:sp>
+      <p:sp>
+        <p:nvSpPr>
+          <p:cNvPr id="90" name="SlideNum"/>
+          <p:cNvSpPr txBox="1"/>
+          <p:nvPr/>
+        </p:nvSpPr>
+        <p:spPr>
+          <a:xfrm>
+            <a:off x="11384280" y="6446520"/>
+            <a:ext cx="640080" cy="292608"/>
+          </a:xfrm>
+          <a:prstGeom prst="rect">
+            <a:avLst/>
+          </a:prstGeom>
+          <a:noFill/>
+        </p:spPr>
+        <p:txBody>
+          <a:bodyPr wrap="none" lIns="0" tIns="0" rIns="45720" bIns="0" anchor="ctr"/>
+          <a:lstStyle/>
+          <a:p>
+            <a:pPr algn="r"/>
+            <a:r>
+              <a:t>122</a:t>
+            </a:r>
+            <a:endParaRPr sz="1000" b="1">
+              <a:solidFill>
+                <a:srgbClr val="7A8A6E"/>
+              </a:solidFill>
+              <a:latin typeface="Calibri"/>
+            </a:endParaRPr>
+          </a:p>
+        </p:txBody>
+      </p:sp>
+      <p:pic>
+        <p:nvPicPr>
+          <p:cNvPr id="33" name="Picture 33" descr="seedling - what grows between Wednesdays"/>
+          <p:cNvPicPr>
+            <a:picLocks noChangeAspect="1"/>
+          </p:cNvPicPr>
+          <p:nvPr/>
+        </p:nvPicPr>
+        <p:blipFill>
+          <a:blip r:embed="rId3"/>
+          <a:stretch>
+            <a:fillRect/>
+          </a:stretch>
+        </p:blipFill>
+        <p:spPr>
+          <a:xfrm>
+            <a:off x="8103612" y="1463040"/>
+            <a:ext cx="3262379" cy="4892040"/>
+          </a:xfrm>
+          <a:prstGeom prst="rect">
+            <a:avLst/>
+          </a:prstGeom>
+          <a:ln w="76200">
+            <a:solidFill>
+              <a:srgbClr val="FFFFFF"/>
+            </a:solidFill>
+          </a:ln>
+          <a:effectLst>
+            <a:outerShdw blurRad="63500" dist="25400" dir="5400000" rotWithShape="0">
+              <a:srgbClr val="000000">
+                <a:alpha val="35000"/>
+              </a:srgbClr>
+            </a:outerShdw>
+          </a:effectLst>
+        </p:spPr>
+      </p:pic>
+    </p:spTree>
+  </p:cSld>
+  <p:clrMapOvr>
+    <a:masterClrMapping/>
+  </p:clrMapOvr>
+</p:sld>
+</file>
+
+<file path=ppt/slides/slide12.xml><?xml version="1.0" encoding="utf-8"?>
+<p:sld xmlns:a="http://schemas.openxmlformats.org/drawingml/2006/main" xmlns:r="http://schemas.openxmlformats.org/officeDocument/2006/relationships" xmlns:p="http://schemas.openxmlformats.org/presentationml/2006/main">
+  <p:cSld>
+    <p:spTree>
+      <p:nvGrpSpPr>
+        <p:cNvPr id="1" name=""/>
+        <p:cNvGrpSpPr/>
+        <p:nvPr/>
+      </p:nvGrpSpPr>
+      <p:grpSpPr>
+        <a:xfrm>
+          <a:off x="0" y="0"/>
+          <a:ext cx="0" cy="0"/>
+          <a:chOff x="0" y="0"/>
+          <a:chExt cx="0" cy="0"/>
+        </a:xfrm>
+      </p:grpSpPr>
+      <p:sp>
+        <p:nvSpPr>
+          <p:cNvPr id="2" name="Rectangle 1"/>
+          <p:cNvSpPr/>
+          <p:nvPr/>
+        </p:nvSpPr>
+        <p:spPr>
+          <a:xfrm>
+            <a:off x="0" y="0"/>
+            <a:ext cx="12191695" cy="6858000"/>
+          </a:xfrm>
+          <a:prstGeom prst="rect">
+            <a:avLst/>
+          </a:prstGeom>
+          <a:solidFill>
+            <a:srgbClr val="FFFFFF"/>
+          </a:solidFill>
+          <a:ln>
+            <a:noFill/>
+          </a:ln>
+        </p:spPr>
+        <p:txBody>
+          <a:bodyPr/>
+          <a:lstStyle/>
+          <a:p>
+            <a:endParaRPr/>
+          </a:p>
+        </p:txBody>
+      </p:sp>
+      <p:sp>
+        <p:nvSpPr>
+          <p:cNvPr id="3" name="TextBox 2"/>
+          <p:cNvSpPr txBox="1"/>
+          <p:nvPr/>
+        </p:nvSpPr>
+        <p:spPr>
+          <a:xfrm>
+            <a:off x="822960" y="502920"/>
+            <a:ext cx="10515600" cy="822960"/>
+          </a:xfrm>
+          <a:prstGeom prst="rect">
+            <a:avLst/>
+          </a:prstGeom>
+          <a:noFill/>
+        </p:spPr>
+        <p:txBody>
+          <a:bodyPr wrap="square">
+            <a:spAutoFit/>
+          </a:bodyPr>
+          <a:lstStyle/>
+          <a:p>
+            <a:pPr algn="l">
+              <a:spcAft>
+                <a:spcPts val="600"/>
+              </a:spcAft>
+            </a:pPr>
+            <a:r>
+              <a:rPr sz="2800" b="1" i="0">
+                <a:solidFill>
+                  <a:srgbClr val="2C5F2D"/>
+                </a:solidFill>
+                <a:latin typeface="Cambria"/>
+              </a:rPr>
+              <a:t>The Leader Feedback Round</a:t>
+            </a:r>
+          </a:p>
+        </p:txBody>
+      </p:sp>
+      <p:sp>
+        <p:nvSpPr>
+          <p:cNvPr id="4" name="TextBox 4"/>
+          <p:cNvSpPr txBox="1"/>
+          <p:nvPr/>
+        </p:nvSpPr>
+        <p:spPr>
+          <a:xfrm>
+            <a:off x="822960" y="1554480"/>
+            <a:ext cx="6675120" cy="4892040"/>
+          </a:xfrm>
+          <a:prstGeom prst="rect">
+            <a:avLst/>
+          </a:prstGeom>
+          <a:noFill/>
+        </p:spPr>
+        <p:txBody>
+          <a:bodyPr wrap="square" lIns="91440" tIns="91440" rIns="91440" bIns="91440"/>
+          <a:lstStyle/>
+          <a:p>
+            <a:pPr marL="274320" indent="-274320">
+              <a:spcAft>
+                <a:spcPts val="900"/>
+              </a:spcAft>
+            </a:pPr>
+            <a:r>
+              <a:rPr sz="2800" b="1" i="0">
+                <a:solidFill>
+                  <a:srgbClr val="97BC62"/>
+                </a:solidFill>
+                <a:latin typeface="Calibri"/>
+              </a:rPr>
+              <a:t>•  </a:t>
+            </a:r>
+            <a:r>
+              <a:rPr sz="2800" b="0" i="0">
+                <a:solidFill>
+                  <a:srgbClr val="222B22"/>
+                </a:solidFill>
+                <a:latin typeface="Calibri"/>
+              </a:rPr>
+              <a:t>Two rounds, same as every session — the container holder first, then the content presenter: three things each</a:t>
+            </a:r>
+          </a:p>
+          <a:p>
+            <a:pPr marL="685800" indent="-274320">
+              <a:spcAft>
+                <a:spcPts val="700"/>
+              </a:spcAft>
+            </a:pPr>
+            <a:r>
+              <a:rPr sz="2000" b="1" i="0">
+                <a:solidFill>
+                  <a:srgbClr val="97BC62"/>
+                </a:solidFill>
+                <a:latin typeface="Calibri"/>
+              </a:rPr>
+              <a:t>–  </a:t>
+            </a:r>
+            <a:r>
+              <a:rPr sz="2000" b="0" i="1">
+                <a:solidFill>
+                  <a:srgbClr val="222B22"/>
+                </a:solidFill>
+                <a:latin typeface="Calibri"/>
+              </a:rPr>
+              <a:t>“What I think went well tonight: ______”</a:t>
+            </a:r>
+          </a:p>
+          <a:p>
+            <a:pPr marL="685800" indent="-274320">
+              <a:spcAft>
+                <a:spcPts val="700"/>
+              </a:spcAft>
+            </a:pPr>
+            <a:r>
+              <a:rPr sz="2000" b="1" i="0">
+                <a:solidFill>
+                  <a:srgbClr val="97BC62"/>
+                </a:solidFill>
+                <a:latin typeface="Calibri"/>
+              </a:rPr>
+              <a:t>–  </a:t>
+            </a:r>
+            <a:r>
+              <a:rPr sz="2000" b="0" i="1">
+                <a:solidFill>
+                  <a:srgbClr val="222B22"/>
+                </a:solidFill>
+                <a:latin typeface="Calibri"/>
+              </a:rPr>
+              <a:t>“What I’d do differently next time: ______”</a:t>
+            </a:r>
+          </a:p>
+          <a:p>
+            <a:pPr marL="685800" indent="-274320">
+              <a:spcAft>
+                <a:spcPts val="700"/>
+              </a:spcAft>
+            </a:pPr>
+            <a:r>
+              <a:rPr sz="2000" b="1" i="0">
+                <a:solidFill>
+                  <a:srgbClr val="97BC62"/>
+                </a:solidFill>
+                <a:latin typeface="Calibri"/>
+              </a:rPr>
+              <a:t>–  </a:t>
+            </a:r>
+            <a:r>
+              <a:rPr sz="2000" b="0" i="1">
+                <a:solidFill>
+                  <a:srgbClr val="222B22"/>
+                </a:solidFill>
+                <a:latin typeface="Calibri"/>
+              </a:rPr>
+              <a:t>“If I were to teach tonight’s process to someone, I would tell them: ______”</a:t>
+            </a:r>
+          </a:p>
+          <a:p>
+            <a:pPr marL="274320" indent="-274320">
+              <a:spcAft>
+                <a:spcPts val="900"/>
+              </a:spcAft>
+            </a:pPr>
+            <a:r>
+              <a:rPr sz="2800" b="1" i="0">
+                <a:solidFill>
+                  <a:srgbClr val="97BC62"/>
+                </a:solidFill>
+                <a:latin typeface="Calibri"/>
+              </a:rPr>
+              <a:t>•  </a:t>
+            </a:r>
+            <a:r>
+              <a:rPr sz="2800" b="0" i="0">
+                <a:solidFill>
+                  <a:srgbClr val="222B22"/>
+                </a:solidFill>
+                <a:latin typeface="Calibri"/>
+              </a:rPr>
+              <a:t>Then the room — the same two questions about tonight</a:t>
+            </a:r>
+          </a:p>
+          <a:p>
+            <a:pPr marL="274320" indent="-274320">
+              <a:spcAft>
+                <a:spcPts val="900"/>
+              </a:spcAft>
+            </a:pPr>
+            <a:r>
+              <a:rPr sz="2800" b="1" i="0">
+                <a:solidFill>
+                  <a:srgbClr val="97BC62"/>
+                </a:solidFill>
+                <a:latin typeface="Calibri"/>
+              </a:rPr>
+              <a:t>•  </a:t>
+            </a:r>
+            <a:r>
+              <a:rPr sz="2800" b="0" i="0">
+                <a:solidFill>
+                  <a:srgbClr val="222B22"/>
+                </a:solidFill>
+                <a:latin typeface="Calibri"/>
+              </a:rPr>
+              <a:t>The leaders receive without defending — “thank you” is the whole response</a:t>
+            </a:r>
+          </a:p>
+        </p:txBody>
+      </p:sp>
+      <p:sp>
+        <p:nvSpPr>
+          <p:cNvPr id="90" name="SlideNum"/>
+          <p:cNvSpPr txBox="1"/>
+          <p:nvPr/>
+        </p:nvSpPr>
+        <p:spPr>
+          <a:xfrm>
+            <a:off x="11384280" y="6446520"/>
+            <a:ext cx="640080" cy="292608"/>
+          </a:xfrm>
+          <a:prstGeom prst="rect">
+            <a:avLst/>
+          </a:prstGeom>
+          <a:noFill/>
+        </p:spPr>
+        <p:txBody>
+          <a:bodyPr wrap="none" lIns="0" tIns="0" rIns="45720" bIns="0" anchor="ctr"/>
+          <a:lstStyle/>
+          <a:p>
+            <a:pPr algn="r"/>
+            <a:r>
+              <a:t>124</a:t>
+            </a:r>
+            <a:endParaRPr sz="1000" b="1">
+              <a:solidFill>
+                <a:srgbClr val="7A8A6E"/>
+              </a:solidFill>
+              <a:latin typeface="Calibri"/>
+            </a:endParaRPr>
+          </a:p>
+        </p:txBody>
+      </p:sp>
+      <p:pic>
+        <p:nvPicPr>
+          <p:cNvPr id="33" name="Picture 33" descr="compass on the trail - the weekly bearing check"/>
+          <p:cNvPicPr>
+            <a:picLocks noChangeAspect="1"/>
+          </p:cNvPicPr>
+          <p:nvPr/>
+        </p:nvPicPr>
+        <p:blipFill>
+          <a:blip r:embed="rId3"/>
+          <a:stretch>
+            <a:fillRect/>
+          </a:stretch>
+        </p:blipFill>
+        <p:spPr>
+          <a:xfrm>
+            <a:off x="8106160" y="1463040"/>
+            <a:ext cx="3259831" cy="4892040"/>
+          </a:xfrm>
+          <a:prstGeom prst="rect">
+            <a:avLst/>
+          </a:prstGeom>
+          <a:ln w="76200">
+            <a:solidFill>
+              <a:srgbClr val="FFFFFF"/>
+            </a:solidFill>
+          </a:ln>
+          <a:effectLst>
+            <a:outerShdw blurRad="63500" dist="25400" dir="5400000" rotWithShape="0">
+              <a:srgbClr val="000000">
+                <a:alpha val="35000"/>
+              </a:srgbClr>
+            </a:outerShdw>
+          </a:effectLst>
+        </p:spPr>
+      </p:pic>
+    </p:spTree>
+  </p:cSld>
+  <p:clrMapOvr>
+    <a:masterClrMapping/>
+  </p:clrMapOvr>
+</p:sld>
+</file>
+
+<file path=ppt/slides/slide13.xml><?xml version="1.0" encoding="utf-8"?>
+<p:sld xmlns:a="http://schemas.openxmlformats.org/drawingml/2006/main" xmlns:r="http://schemas.openxmlformats.org/officeDocument/2006/relationships" xmlns:p="http://schemas.openxmlformats.org/presentationml/2006/main">
+  <p:cSld>
+    <p:spTree>
+      <p:nvGrpSpPr>
+        <p:cNvPr id="1" name=""/>
+        <p:cNvGrpSpPr/>
+        <p:nvPr/>
+      </p:nvGrpSpPr>
+      <p:grpSpPr>
+        <a:xfrm>
+          <a:off x="0" y="0"/>
+          <a:ext cx="0" cy="0"/>
+          <a:chOff x="0" y="0"/>
+          <a:chExt cx="0" cy="0"/>
+        </a:xfrm>
+      </p:grpSpPr>
+      <p:sp>
+        <p:nvSpPr>
+          <p:cNvPr id="2" name="Rectangle 1"/>
+          <p:cNvSpPr/>
+          <p:nvPr/>
+        </p:nvSpPr>
+        <p:spPr>
+          <a:xfrm>
+            <a:off x="0" y="0"/>
+            <a:ext cx="12191695" cy="6858000"/>
+          </a:xfrm>
+          <a:prstGeom prst="rect">
+            <a:avLst/>
+          </a:prstGeom>
+          <a:solidFill>
+            <a:srgbClr val="FFFFFF"/>
+          </a:solidFill>
+          <a:ln>
+            <a:noFill/>
+          </a:ln>
+        </p:spPr>
+        <p:txBody>
+          <a:bodyPr/>
+          <a:lstStyle/>
+          <a:p>
+            <a:endParaRPr/>
+          </a:p>
+        </p:txBody>
+      </p:sp>
+      <p:sp>
+        <p:nvSpPr>
+          <p:cNvPr id="3" name="TextBox 2"/>
+          <p:cNvSpPr txBox="1"/>
+          <p:nvPr/>
+        </p:nvSpPr>
+        <p:spPr>
+          <a:xfrm>
+            <a:off x="822960" y="502920"/>
+            <a:ext cx="10515600" cy="822960"/>
+          </a:xfrm>
+          <a:prstGeom prst="rect">
+            <a:avLst/>
+          </a:prstGeom>
+          <a:noFill/>
+        </p:spPr>
+        <p:txBody>
+          <a:bodyPr wrap="square">
+            <a:spAutoFit/>
+          </a:bodyPr>
+          <a:lstStyle/>
+          <a:p>
+            <a:pPr algn="l">
+              <a:spcAft>
+                <a:spcPts val="600"/>
+              </a:spcAft>
+            </a:pPr>
+            <a:r>
+              <a:rPr sz="2800" b="1" i="0">
+                <a:solidFill>
+                  <a:srgbClr val="2C5F2D"/>
+                </a:solidFill>
+                <a:latin typeface="Cambria"/>
+              </a:rPr>
+              <a:t>Closing the Container + Aaronic Blessing</a:t>
+            </a:r>
+          </a:p>
+        </p:txBody>
+      </p:sp>
+      <p:sp>
+        <p:nvSpPr>
+          <p:cNvPr id="4" name="TextBox 4"/>
+          <p:cNvSpPr txBox="1"/>
+          <p:nvPr/>
+        </p:nvSpPr>
+        <p:spPr>
+          <a:xfrm>
+            <a:off x="822960" y="1600200"/>
+            <a:ext cx="5669280" cy="4572000"/>
+          </a:xfrm>
+          <a:prstGeom prst="rect">
+            <a:avLst/>
+          </a:prstGeom>
+          <a:noFill/>
+        </p:spPr>
+        <p:txBody>
+          <a:bodyPr wrap="square" lIns="91440" tIns="91440" rIns="91440" bIns="91440"/>
+          <a:lstStyle/>
+          <a:p>
+            <a:pPr marL="274320" indent="-274320">
+              <a:spcAft>
+                <a:spcPts val="900"/>
+              </a:spcAft>
+            </a:pPr>
+            <a:r>
+              <a:rPr sz="2200" b="1" i="0">
+                <a:solidFill>
+                  <a:srgbClr val="97BC62"/>
+                </a:solidFill>
+                <a:latin typeface="Calibri"/>
+              </a:rPr>
+              <a:t>•  </a:t>
+            </a:r>
+            <a:r>
+              <a:rPr sz="2200" b="0" i="0">
+                <a:solidFill>
+                  <a:srgbClr val="222B22"/>
+                </a:solidFill>
+                <a:latin typeface="Calibri"/>
+              </a:rPr>
+              <a:t>We close the way we opened — the container, six steps:</a:t>
+            </a:r>
+          </a:p>
+          <a:p>
+            <a:pPr marL="685800" indent="-274320">
+              <a:spcAft>
+                <a:spcPts val="700"/>
+              </a:spcAft>
+            </a:pPr>
+            <a:r>
+              <a:rPr sz="2000" b="1" i="0">
+                <a:solidFill>
+                  <a:srgbClr val="97BC62"/>
+                </a:solidFill>
+                <a:latin typeface="Calibri"/>
+              </a:rPr>
+              <a:t>1   </a:t>
+            </a:r>
+            <a:r>
+              <a:rPr sz="2000" b="0" i="0">
+                <a:solidFill>
+                  <a:srgbClr val="222B22"/>
+                </a:solidFill>
+                <a:latin typeface="Calibri"/>
+              </a:rPr>
+              <a:t>Stand again — same circle, same posture as the open</a:t>
+            </a:r>
+          </a:p>
+          <a:p>
+            <a:pPr marL="685800" indent="-274320">
+              <a:spcAft>
+                <a:spcPts val="700"/>
+              </a:spcAft>
+            </a:pPr>
+            <a:r>
+              <a:rPr sz="2000" b="1" i="0">
+                <a:solidFill>
+                  <a:srgbClr val="97BC62"/>
+                </a:solidFill>
+                <a:latin typeface="Calibri"/>
+              </a:rPr>
+              <a:t>2   </a:t>
+            </a:r>
+            <a:r>
+              <a:rPr sz="2000" b="0" i="0">
+                <a:solidFill>
+                  <a:srgbClr val="222B22"/>
+                </a:solidFill>
+                <a:latin typeface="Calibri"/>
+              </a:rPr>
+              <a:t>One-word landing — compare it to your opening word</a:t>
+            </a:r>
+          </a:p>
+          <a:p>
+            <a:pPr marL="685800" indent="-274320">
+              <a:spcAft>
+                <a:spcPts val="700"/>
+              </a:spcAft>
+            </a:pPr>
+            <a:r>
+              <a:rPr sz="2000" b="1" i="0">
+                <a:solidFill>
+                  <a:srgbClr val="97BC62"/>
+                </a:solidFill>
+                <a:latin typeface="Calibri"/>
+              </a:rPr>
+              <a:t>3   </a:t>
+            </a:r>
+            <a:r>
+              <a:rPr sz="2000" b="0" i="0">
+                <a:solidFill>
+                  <a:srgbClr val="222B22"/>
+                </a:solidFill>
+                <a:latin typeface="Calibri"/>
+              </a:rPr>
+              <a:t>The one thing you are taking from tonight</a:t>
+            </a:r>
+          </a:p>
+          <a:p>
+            <a:pPr marL="685800" indent="-274320">
+              <a:spcAft>
+                <a:spcPts val="700"/>
+              </a:spcAft>
+            </a:pPr>
+            <a:r>
+              <a:rPr sz="2000" b="1" i="0">
+                <a:solidFill>
+                  <a:srgbClr val="97BC62"/>
+                </a:solidFill>
+                <a:latin typeface="Calibri"/>
+              </a:rPr>
+              <a:t>4   </a:t>
+            </a:r>
+            <a:r>
+              <a:rPr sz="2000" b="0" i="0">
+                <a:solidFill>
+                  <a:srgbClr val="222B22"/>
+                </a:solidFill>
+                <a:latin typeface="Calibri"/>
+              </a:rPr>
+              <a:t>The one practice — committed aloud, or modified to one you will actually keep</a:t>
+            </a:r>
+          </a:p>
+          <a:p>
+            <a:pPr marL="685800" indent="-274320">
+              <a:spcAft>
+                <a:spcPts val="700"/>
+              </a:spcAft>
+            </a:pPr>
+            <a:r>
+              <a:rPr sz="2000" b="1" i="0">
+                <a:solidFill>
+                  <a:srgbClr val="97BC62"/>
+                </a:solidFill>
+                <a:latin typeface="Calibri"/>
+              </a:rPr>
+              <a:t>5   </a:t>
+            </a:r>
+            <a:r>
+              <a:rPr sz="2000" b="0" i="0">
+                <a:solidFill>
+                  <a:srgbClr val="222B22"/>
+                </a:solidFill>
+                <a:latin typeface="Calibri"/>
+              </a:rPr>
+              <a:t>Blessings — specific, witnessed, short</a:t>
+            </a:r>
+          </a:p>
+          <a:p>
+            <a:pPr marL="685800" indent="-274320">
+              <a:spcAft>
+                <a:spcPts val="700"/>
+              </a:spcAft>
+            </a:pPr>
+            <a:r>
+              <a:rPr sz="2000" b="1" i="0">
+                <a:solidFill>
+                  <a:srgbClr val="97BC62"/>
+                </a:solidFill>
+                <a:latin typeface="Calibri"/>
+              </a:rPr>
+              <a:t>6   </a:t>
+            </a:r>
+            <a:r>
+              <a:rPr sz="2000" b="0" i="0">
+                <a:solidFill>
+                  <a:srgbClr val="222B22"/>
+                </a:solidFill>
+                <a:latin typeface="Calibri"/>
+              </a:rPr>
+              <a:t>Closing prayer — and the Aaronic blessing, spoken over each other, face to face</a:t>
+            </a:r>
+          </a:p>
+        </p:txBody>
+      </p:sp>
+      <p:sp>
+        <p:nvSpPr>
+          <p:cNvPr id="6" name="TextBox 6"/>
+          <p:cNvSpPr txBox="1"/>
+          <p:nvPr/>
+        </p:nvSpPr>
+        <p:spPr>
+          <a:xfrm>
+            <a:off x="6766560" y="1737360"/>
+            <a:ext cx="4663440" cy="2926080"/>
+          </a:xfrm>
+          <a:prstGeom prst="rect">
+            <a:avLst/>
+          </a:prstGeom>
+          <a:solidFill>
+            <a:srgbClr val="F1F6EC"/>
+          </a:solidFill>
+        </p:spPr>
+        <p:txBody>
+          <a:bodyPr wrap="square" lIns="91440" tIns="91440" rIns="91440" bIns="91440" anchor="ctr"/>
+          <a:lstStyle/>
+          <a:p>
+            <a:pPr>
+              <a:spcAft>
+                <a:spcPts val="900"/>
+              </a:spcAft>
+            </a:pPr>
+            <a:r>
+              <a:rPr sz="1200" b="1" i="0">
+                <a:solidFill>
+                  <a:srgbClr val="97BC62"/>
+                </a:solidFill>
+                <a:latin typeface="Calibri"/>
+              </a:rPr>
+              <a:t>THE AARONIC BLESSING — NUMBERS 6:24–26</a:t>
+            </a:r>
+          </a:p>
+          <a:p>
+            <a:pPr>
+              <a:spcAft>
+                <a:spcPts val="600"/>
+              </a:spcAft>
+            </a:pPr>
+            <a:r>
+              <a:rPr sz="2400" b="0" i="1">
+                <a:solidFill>
+                  <a:srgbClr val="222B22"/>
+                </a:solidFill>
+                <a:latin typeface="Cambria"/>
+              </a:rPr>
+              <a:t>“The Lord bless you and keep you;</a:t>
+            </a:r>
+          </a:p>
+          <a:p>
+            <a:pPr>
+              <a:spcAft>
+                <a:spcPts val="600"/>
+              </a:spcAft>
+            </a:pPr>
+            <a:r>
+              <a:rPr sz="2400" b="0" i="1">
+                <a:solidFill>
+                  <a:srgbClr val="222B22"/>
+                </a:solidFill>
+                <a:latin typeface="Cambria"/>
+              </a:rPr>
+              <a:t>the Lord make his face to shine upon you, and be gracious to you;</a:t>
+            </a:r>
+          </a:p>
+          <a:p>
+            <a:pPr>
+              <a:spcAft>
+                <a:spcPts val="600"/>
+              </a:spcAft>
+            </a:pPr>
+            <a:r>
+              <a:rPr sz="2400" b="0" i="1">
+                <a:solidFill>
+                  <a:srgbClr val="222B22"/>
+                </a:solidFill>
+                <a:latin typeface="Cambria"/>
+              </a:rPr>
+              <a:t>the Lord lift up his countenance upon you, and give you peace.”</a:t>
+            </a:r>
+          </a:p>
+        </p:txBody>
+      </p:sp>
+      <p:sp>
+        <p:nvSpPr>
+          <p:cNvPr id="90" name="SlideNum"/>
+          <p:cNvSpPr txBox="1"/>
+          <p:nvPr/>
+        </p:nvSpPr>
+        <p:spPr>
+          <a:xfrm>
+            <a:off x="11384280" y="6446520"/>
+            <a:ext cx="640080" cy="292608"/>
+          </a:xfrm>
+          <a:prstGeom prst="rect">
+            <a:avLst/>
+          </a:prstGeom>
+          <a:noFill/>
+        </p:spPr>
+        <p:txBody>
+          <a:bodyPr wrap="none" lIns="0" tIns="0" rIns="45720" bIns="0" anchor="ctr"/>
+          <a:lstStyle/>
+          <a:p>
+            <a:pPr algn="r"/>
+            <a:r>
+              <a:t>125</a:t>
+            </a:r>
+            <a:endParaRPr sz="1000" b="1">
+              <a:solidFill>
+                <a:srgbClr val="7A8A6E"/>
+              </a:solidFill>
+              <a:latin typeface="Calibri"/>
+            </a:endParaRPr>
+          </a:p>
+        </p:txBody>
+      </p:sp>
+    </p:spTree>
+  </p:cSld>
+  <p:clrMapOvr>
+    <a:masterClrMapping/>
+  </p:clrMapOvr>
+</p:sld>
+</file>
+
+<file path=ppt/slides/slide14.xml><?xml version="1.0" encoding="utf-8"?>
+<p:sld xmlns:a="http://schemas.openxmlformats.org/drawingml/2006/main" xmlns:p="http://schemas.openxmlformats.org/presentationml/2006/main" xmlns:r="http://schemas.openxmlformats.org/officeDocument/2006/relationships">
+  <p:cSld>
+    <p:spTree>
+      <p:nvGrpSpPr>
+        <p:cNvPr id="1" name=""/>
+        <p:cNvGrpSpPr/>
+        <p:nvPr/>
+      </p:nvGrpSpPr>
+      <p:grpSpPr/>
+      <p:sp>
+        <p:nvSpPr>
+          <p:cNvPr id="2" name="Rectangle 1"/>
+          <p:cNvSpPr/>
+          <p:nvPr/>
+        </p:nvSpPr>
+        <p:spPr>
+          <a:xfrm>
+            <a:off x="0" y="0"/>
+            <a:ext cx="12192000" cy="6858000"/>
+          </a:xfrm>
+          <a:prstGeom prst="rect">
+            <a:avLst/>
+          </a:prstGeom>
+          <a:solidFill>
+            <a:srgbClr val="FFFFFF"/>
+          </a:solidFill>
+          <a:ln>
+            <a:noFill/>
+          </a:ln>
+          <a:effectLst/>
+        </p:spPr>
+        <p:style>
+          <a:lnRef idx="1">
+            <a:schemeClr val="accent1"/>
+          </a:lnRef>
+          <a:fillRef idx="3">
+            <a:schemeClr val="accent1"/>
+          </a:fillRef>
+          <a:effectRef idx="2">
+            <a:schemeClr val="accent1"/>
+          </a:effectRef>
+          <a:fontRef idx="minor">
+            <a:schemeClr val="lt1"/>
+          </a:fontRef>
+        </p:style>
+        <p:txBody>
+          <a:bodyPr rtlCol="0" anchor="ctr"/>
+          <a:lstStyle/>
+          <a:p>
+            <a:pPr algn="ctr"/>
+          </a:p>
+        </p:txBody>
+      </p:sp>
+      <p:sp>
+        <p:nvSpPr>
+          <p:cNvPr id="3" name="TextBox 2"/>
+          <p:cNvSpPr txBox="1"/>
+          <p:nvPr/>
+        </p:nvSpPr>
+        <p:spPr>
+          <a:xfrm>
+            <a:off x="822960" y="502920"/>
+            <a:ext cx="10515600" cy="822960"/>
+          </a:xfrm>
+          <a:prstGeom prst="rect">
+            <a:avLst/>
+          </a:prstGeom>
+          <a:noFill/>
+        </p:spPr>
+        <p:txBody>
+          <a:bodyPr wrap="square">
+            <a:spAutoFit/>
+          </a:bodyPr>
+          <a:lstStyle/>
+          <a:p>
+            <a:r>
+              <a:rPr sz="2800" b="1">
+                <a:solidFill>
+                  <a:srgbClr val="2C5F2D"/>
+                </a:solidFill>
+                <a:latin typeface="Cambria"/>
+              </a:rPr>
+              <a:t>Where We Are — the Four Connects</a:t>
+            </a:r>
+          </a:p>
+        </p:txBody>
+      </p:sp>
+      <p:pic>
+        <p:nvPicPr>
+          <p:cNvPr id="4" name="Picture 3" descr="four-connects.png"/>
+          <p:cNvPicPr>
+            <a:picLocks noChangeAspect="1"/>
+          </p:cNvPicPr>
+          <p:nvPr/>
+        </p:nvPicPr>
+        <p:blipFill>
+          <a:blip r:embed="rId2"/>
+          <a:stretch>
+            <a:fillRect/>
+          </a:stretch>
+        </p:blipFill>
+        <p:spPr>
+          <a:xfrm>
+            <a:off x="932688" y="1645920"/>
+            <a:ext cx="10332720" cy="3708663"/>
+          </a:xfrm>
+          <a:prstGeom prst="rect">
+            <a:avLst/>
+          </a:prstGeom>
+        </p:spPr>
+      </p:pic>
+      <p:sp>
+        <p:nvSpPr>
+          <p:cNvPr id="5" name="TextBox 4"/>
+          <p:cNvSpPr txBox="1"/>
+          <p:nvPr/>
+        </p:nvSpPr>
+        <p:spPr>
+          <a:xfrm>
+            <a:off x="822960" y="5623560"/>
+            <a:ext cx="10515600" cy="914400"/>
+          </a:xfrm>
+          <a:prstGeom prst="rect">
+            <a:avLst/>
+          </a:prstGeom>
+          <a:noFill/>
+        </p:spPr>
+        <p:txBody>
+          <a:bodyPr wrap="square">
+            <a:spAutoFit/>
+          </a:bodyPr>
+          <a:lstStyle/>
+          <a:p>
+            <a:r>
+              <a:rPr sz="1800" b="0">
+                <a:solidFill>
+                  <a:srgbClr val="222B22"/>
+                </a:solidFill>
+                <a:latin typeface="Calibri"/>
+              </a:rPr>
+              <a:t>Session 9 stands in the third box — </a:t>
+            </a:r>
+            <a:r>
+              <a:rPr sz="1800" b="1">
+                <a:solidFill>
+                  <a:srgbClr val="2C5F2D"/>
+                </a:solidFill>
+                <a:latin typeface="Calibri"/>
+              </a:rPr>
+              <a:t>Connect with God</a:t>
+            </a:r>
+            <a:r>
+              <a:rPr sz="1800" b="0">
+                <a:solidFill>
+                  <a:srgbClr val="222B22"/>
+                </a:solidFill>
+                <a:latin typeface="Calibri"/>
+              </a:rPr>
+              <a:t>. Each connection makes the next one real (Matt. 22:37–40).</a:t>
+            </a:r>
+          </a:p>
+        </p:txBody>
+      </p:sp>
+      <p:sp>
+        <p:nvSpPr>
+          <p:cNvPr id="90" name="SlideNum"/>
+          <p:cNvSpPr txBox="1"/>
+          <p:nvPr/>
+        </p:nvSpPr>
+        <p:spPr>
+          <a:xfrm>
+            <a:off x="11384280" y="6446520"/>
+            <a:ext cx="640080" cy="292608"/>
+          </a:xfrm>
+          <a:prstGeom prst="rect">
+            <a:avLst/>
+          </a:prstGeom>
+          <a:noFill/>
+        </p:spPr>
+        <p:txBody>
+          <a:bodyPr wrap="none" lIns="0" tIns="0" rIns="45720" bIns="0" anchor="ctr"/>
+          <a:lstStyle/>
+          <a:p>
+            <a:pPr algn="r"/>
+            <a:r>
+              <a:t>114a</a:t>
+            </a:r>
+            <a:endParaRPr sz="1000" b="1">
+              <a:solidFill>
+                <a:srgbClr val="7A8A6E"/>
+              </a:solidFill>
+              <a:latin typeface="Calibri"/>
+            </a:endParaRPr>
+          </a:p>
+        </p:txBody>
+      </p:sp>
+    </p:spTree>
+  </p:cSld>
+  <p:clrMapOvr>
+    <a:masterClrMapping/>
+  </p:clrMapOvr>
+</p:sld>
+</file>
+
+<file path=ppt/slides/slide15.xml><?xml version="1.0" encoding="utf-8"?>
+<p:sld xmlns:a="http://schemas.openxmlformats.org/drawingml/2006/main" xmlns:p="http://schemas.openxmlformats.org/presentationml/2006/main" xmlns:r="http://schemas.openxmlformats.org/officeDocument/2006/relationships">
+  <p:cSld>
+    <p:spTree>
+      <p:nvGrpSpPr>
+        <p:cNvPr id="1" name=""/>
+        <p:cNvGrpSpPr/>
+        <p:nvPr/>
+      </p:nvGrpSpPr>
+      <p:grpSpPr/>
+      <p:sp>
+        <p:nvSpPr>
+          <p:cNvPr id="2" name="Rectangle 1"/>
+          <p:cNvSpPr/>
+          <p:nvPr/>
+        </p:nvSpPr>
+        <p:spPr>
+          <a:xfrm>
+            <a:off x="0" y="0"/>
+            <a:ext cx="12192000" cy="6858000"/>
+          </a:xfrm>
+          <a:prstGeom prst="rect">
+            <a:avLst/>
+          </a:prstGeom>
+          <a:solidFill>
+            <a:srgbClr val="FFFFFF"/>
+          </a:solidFill>
+          <a:ln>
+            <a:noFill/>
+          </a:ln>
+          <a:effectLst/>
+        </p:spPr>
+        <p:style>
+          <a:lnRef idx="1">
+            <a:schemeClr val="accent1"/>
+          </a:lnRef>
+          <a:fillRef idx="3">
+            <a:schemeClr val="accent1"/>
+          </a:fillRef>
+          <a:effectRef idx="2">
+            <a:schemeClr val="accent1"/>
+          </a:effectRef>
+          <a:fontRef idx="minor">
+            <a:schemeClr val="lt1"/>
+          </a:fontRef>
+        </p:style>
+        <p:txBody>
+          <a:bodyPr rtlCol="0" anchor="ctr"/>
+          <a:lstStyle/>
+          <a:p>
+            <a:pPr algn="ctr"/>
+          </a:p>
+        </p:txBody>
+      </p:sp>
+      <p:sp>
+        <p:nvSpPr>
+          <p:cNvPr id="3" name="TextBox 2"/>
+          <p:cNvSpPr txBox="1"/>
+          <p:nvPr/>
+        </p:nvSpPr>
+        <p:spPr>
+          <a:xfrm>
+            <a:off x="822960" y="502920"/>
+            <a:ext cx="10515600" cy="822960"/>
+          </a:xfrm>
+          <a:prstGeom prst="rect">
+            <a:avLst/>
+          </a:prstGeom>
+          <a:noFill/>
+        </p:spPr>
+        <p:txBody>
+          <a:bodyPr wrap="square">
+            <a:spAutoFit/>
+          </a:bodyPr>
+          <a:lstStyle/>
+          <a:p>
+            <a:r>
+              <a:rPr sz="2800" b="1">
+                <a:solidFill>
+                  <a:srgbClr val="2C5F2D"/>
+                </a:solidFill>
+                <a:latin typeface="Cambria"/>
+              </a:rPr>
+              <a:t>The Take-Home Sheet — the Daily Rhythm</a:t>
+            </a:r>
+          </a:p>
+        </p:txBody>
+      </p:sp>
+      <p:pic>
+        <p:nvPicPr>
+          <p:cNvPr id="4" name="Picture 3" descr="s9_part1.png"/>
+          <p:cNvPicPr>
+            <a:picLocks noChangeAspect="1"/>
+          </p:cNvPicPr>
+          <p:nvPr/>
+        </p:nvPicPr>
+        <p:blipFill>
+          <a:blip r:embed="rId2"/>
+          <a:stretch>
+            <a:fillRect/>
+          </a:stretch>
+        </p:blipFill>
+        <p:spPr>
+          <a:xfrm>
+            <a:off x="1798167" y="1463040"/>
+            <a:ext cx="8595360" cy="4039819"/>
+          </a:xfrm>
+          <a:prstGeom prst="rect">
+            <a:avLst/>
+          </a:prstGeom>
+          <a:ln w="12700">
+            <a:solidFill>
+              <a:srgbClr val="C8C8C8"/>
+            </a:solidFill>
+          </a:ln>
+        </p:spPr>
+      </p:pic>
+      <p:sp>
+        <p:nvSpPr>
+          <p:cNvPr id="5" name="TextBox 4"/>
+          <p:cNvSpPr txBox="1"/>
+          <p:nvPr/>
+        </p:nvSpPr>
+        <p:spPr>
+          <a:xfrm>
+            <a:off x="822960" y="6355080"/>
+            <a:ext cx="10515600" cy="411480"/>
+          </a:xfrm>
+          <a:prstGeom prst="rect">
+            <a:avLst/>
+          </a:prstGeom>
+          <a:noFill/>
+        </p:spPr>
+        <p:txBody>
+          <a:bodyPr wrap="square">
+            <a:spAutoFit/>
+          </a:bodyPr>
+          <a:lstStyle/>
+          <a:p>
+            <a:r>
+              <a:rPr sz="1400" i="1">
+                <a:solidFill>
+                  <a:srgbClr val="595959"/>
+                </a:solidFill>
+                <a:latin typeface="Calibri"/>
+              </a:rPr>
+              <a:t>Handed out now — this is the sheet in your hands.</a:t>
+            </a:r>
+          </a:p>
+        </p:txBody>
+      </p:sp>
+      <p:sp>
+        <p:nvSpPr>
+          <p:cNvPr id="90" name="SlideNum"/>
+          <p:cNvSpPr txBox="1"/>
+          <p:nvPr/>
+        </p:nvSpPr>
+        <p:spPr>
+          <a:xfrm>
+            <a:off x="11384280" y="6446520"/>
+            <a:ext cx="640080" cy="292608"/>
+          </a:xfrm>
+          <a:prstGeom prst="rect">
+            <a:avLst/>
+          </a:prstGeom>
+          <a:noFill/>
+        </p:spPr>
+        <p:txBody>
+          <a:bodyPr wrap="none" lIns="0" tIns="0" rIns="45720" bIns="0" anchor="ctr"/>
+          <a:lstStyle/>
+          <a:p>
+            <a:pPr algn="r"/>
+            <a:r>
+              <a:t>123</a:t>
+            </a:r>
+            <a:endParaRPr sz="1000" b="1">
+              <a:solidFill>
+                <a:srgbClr val="7A8A6E"/>
+              </a:solidFill>
+              <a:latin typeface="Calibri"/>
+            </a:endParaRPr>
+          </a:p>
+        </p:txBody>
+      </p:sp>
+    </p:spTree>
+  </p:cSld>
+  <p:clrMapOvr>
+    <a:masterClrMapping/>
+  </p:clrMapOvr>
+</p:sld>
+</file>
+
+<file path=ppt/slides/slide16.xml><?xml version="1.0" encoding="utf-8"?>
+<p:sld xmlns:a="http://schemas.openxmlformats.org/drawingml/2006/main" xmlns:p="http://schemas.openxmlformats.org/presentationml/2006/main" xmlns:r="http://schemas.openxmlformats.org/officeDocument/2006/relationships">
+  <p:cSld>
+    <p:spTree>
+      <p:nvGrpSpPr>
+        <p:cNvPr id="1" name=""/>
+        <p:cNvGrpSpPr/>
+        <p:nvPr/>
+      </p:nvGrpSpPr>
+      <p:grpSpPr/>
+      <p:sp>
+        <p:nvSpPr>
+          <p:cNvPr id="2" name="Rectangle 1"/>
+          <p:cNvSpPr/>
+          <p:nvPr/>
+        </p:nvSpPr>
+        <p:spPr>
+          <a:xfrm>
+            <a:off x="0" y="0"/>
+            <a:ext cx="12192000" cy="6858000"/>
+          </a:xfrm>
+          <a:prstGeom prst="rect">
+            <a:avLst/>
+          </a:prstGeom>
+          <a:solidFill>
+            <a:srgbClr val="FFFFFF"/>
+          </a:solidFill>
+          <a:ln>
+            <a:noFill/>
+          </a:ln>
+          <a:effectLst/>
+        </p:spPr>
+        <p:style>
+          <a:lnRef idx="1">
+            <a:schemeClr val="accent1"/>
+          </a:lnRef>
+          <a:fillRef idx="3">
+            <a:schemeClr val="accent1"/>
+          </a:fillRef>
+          <a:effectRef idx="2">
+            <a:schemeClr val="accent1"/>
+          </a:effectRef>
+          <a:fontRef idx="minor">
+            <a:schemeClr val="lt1"/>
+          </a:fontRef>
+        </p:style>
+        <p:txBody>
+          <a:bodyPr rtlCol="0" anchor="ctr"/>
+          <a:lstStyle/>
+          <a:p>
+            <a:pPr algn="ctr"/>
+          </a:p>
+        </p:txBody>
+      </p:sp>
+      <p:sp>
+        <p:nvSpPr>
+          <p:cNvPr id="3" name="TextBox 2"/>
+          <p:cNvSpPr txBox="1"/>
+          <p:nvPr/>
+        </p:nvSpPr>
+        <p:spPr>
+          <a:xfrm>
+            <a:off x="822960" y="502920"/>
+            <a:ext cx="10515600" cy="822960"/>
+          </a:xfrm>
+          <a:prstGeom prst="rect">
+            <a:avLst/>
+          </a:prstGeom>
+          <a:noFill/>
+        </p:spPr>
+        <p:txBody>
+          <a:bodyPr wrap="square">
+            <a:spAutoFit/>
+          </a:bodyPr>
+          <a:lstStyle/>
+          <a:p>
+            <a:r>
+              <a:rPr sz="2800" b="1">
+                <a:solidFill>
+                  <a:srgbClr val="2C5F2D"/>
+                </a:solidFill>
+                <a:latin typeface="Cambria"/>
+              </a:rPr>
+              <a:t>The Take-Home Sheet — the Four Parts</a:t>
+            </a:r>
+          </a:p>
+        </p:txBody>
+      </p:sp>
+      <p:pic>
+        <p:nvPicPr>
+          <p:cNvPr id="4" name="Picture 3" descr="s9_part2.png"/>
+          <p:cNvPicPr>
+            <a:picLocks noChangeAspect="1"/>
+          </p:cNvPicPr>
+          <p:nvPr/>
+        </p:nvPicPr>
+        <p:blipFill>
+          <a:blip r:embed="rId2"/>
+          <a:stretch>
+            <a:fillRect/>
+          </a:stretch>
+        </p:blipFill>
+        <p:spPr>
+          <a:xfrm>
+            <a:off x="2066004" y="1463040"/>
+            <a:ext cx="8059687" cy="4709160"/>
+          </a:xfrm>
+          <a:prstGeom prst="rect">
+            <a:avLst/>
+          </a:prstGeom>
+          <a:ln w="12700">
+            <a:solidFill>
+              <a:srgbClr val="C8C8C8"/>
+            </a:solidFill>
+          </a:ln>
+        </p:spPr>
+      </p:pic>
+      <p:sp>
+        <p:nvSpPr>
+          <p:cNvPr id="5" name="TextBox 4"/>
+          <p:cNvSpPr txBox="1"/>
+          <p:nvPr/>
+        </p:nvSpPr>
+        <p:spPr>
+          <a:xfrm>
+            <a:off x="822960" y="6355080"/>
+            <a:ext cx="10515600" cy="411480"/>
+          </a:xfrm>
+          <a:prstGeom prst="rect">
+            <a:avLst/>
+          </a:prstGeom>
+          <a:noFill/>
+        </p:spPr>
+        <p:txBody>
+          <a:bodyPr wrap="square">
+            <a:spAutoFit/>
+          </a:bodyPr>
+          <a:lstStyle/>
+          <a:p>
+            <a:r>
+              <a:rPr sz="1400" i="1">
+                <a:solidFill>
+                  <a:srgbClr val="595959"/>
+                </a:solidFill>
+                <a:latin typeface="Calibri"/>
+              </a:rPr>
+              <a:t>One practice at a time — and a partner expecting you at the end of week one.</a:t>
+            </a:r>
+          </a:p>
+        </p:txBody>
+      </p:sp>
+      <p:sp>
+        <p:nvSpPr>
+          <p:cNvPr id="90" name="SlideNum"/>
+          <p:cNvSpPr txBox="1"/>
+          <p:nvPr/>
+        </p:nvSpPr>
+        <p:spPr>
+          <a:xfrm>
+            <a:off x="11384280" y="6446520"/>
+            <a:ext cx="640080" cy="292608"/>
+          </a:xfrm>
+          <a:prstGeom prst="rect">
+            <a:avLst/>
+          </a:prstGeom>
+          <a:noFill/>
+        </p:spPr>
+        <p:txBody>
+          <a:bodyPr wrap="none" lIns="0" tIns="0" rIns="45720" bIns="0" anchor="ctr"/>
+          <a:lstStyle/>
+          <a:p>
+            <a:pPr algn="r"/>
+            <a:r>
+              <a:t>123a</a:t>
+            </a:r>
+            <a:endParaRPr sz="1000" b="1">
+              <a:solidFill>
+                <a:srgbClr val="7A8A6E"/>
+              </a:solidFill>
+              <a:latin typeface="Calibri"/>
+            </a:endParaRPr>
+          </a:p>
+        </p:txBody>
+      </p:sp>
+    </p:spTree>
+  </p:cSld>
+  <p:clrMapOvr>
+    <a:masterClrMapping/>
+  </p:clrMapOvr>
+</p:sld>
+</file>
+
+<file path=ppt/slides/slide2.xml><?xml version="1.0" encoding="utf-8"?>
 <p:sld xmlns:a="http://schemas.openxmlformats.org/drawingml/2006/main" xmlns:r="http://schemas.openxmlformats.org/officeDocument/2006/relationships" xmlns:p="http://schemas.openxmlformats.org/presentationml/2006/main">
   <p:cSld>
     <p:spTree>
@@ -4870,7 +6694,7 @@
 </p:sld>
 </file>
 
-<file path=ppt/slides/slide115.xml><?xml version="1.0" encoding="utf-8"?>
+<file path=ppt/slides/slide3.xml><?xml version="1.0" encoding="utf-8"?>
 <p:sld xmlns:a="http://schemas.openxmlformats.org/drawingml/2006/main" xmlns:r="http://schemas.openxmlformats.org/officeDocument/2006/relationships" xmlns:p="http://schemas.openxmlformats.org/presentationml/2006/main">
   <p:cSld>
     <p:spTree>
@@ -5296,7 +7120,7 @@
 </p:sld>
 </file>
 
-<file path=ppt/slides/slide116.xml><?xml version="1.0" encoding="utf-8"?>
+<file path=ppt/slides/slide4.xml><?xml version="1.0" encoding="utf-8"?>
 <p:sld xmlns:a="http://schemas.openxmlformats.org/drawingml/2006/main" xmlns:r="http://schemas.openxmlformats.org/officeDocument/2006/relationships" xmlns:p="http://schemas.openxmlformats.org/presentationml/2006/main">
   <p:cSld>
     <p:spTree>
@@ -5643,7 +7467,7 @@
 </p:sld>
 </file>
 
-<file path=ppt/slides/slide117.xml><?xml version="1.0" encoding="utf-8"?>
+<file path=ppt/slides/slide5.xml><?xml version="1.0" encoding="utf-8"?>
 <p:sld xmlns:a="http://schemas.openxmlformats.org/drawingml/2006/main" xmlns:r="http://schemas.openxmlformats.org/officeDocument/2006/relationships" xmlns:p="http://schemas.openxmlformats.org/presentationml/2006/main">
   <p:cSld>
     <p:spTree>
@@ -5926,7 +7750,7 @@
 </p:sld>
 </file>
 
-<file path=ppt/slides/slide118.xml><?xml version="1.0" encoding="utf-8"?>
+<file path=ppt/slides/slide6.xml><?xml version="1.0" encoding="utf-8"?>
 <p:sld xmlns:a="http://schemas.openxmlformats.org/drawingml/2006/main" xmlns:r="http://schemas.openxmlformats.org/officeDocument/2006/relationships" xmlns:p="http://schemas.openxmlformats.org/presentationml/2006/main">
   <p:cSld>
     <p:spTree>
@@ -6314,7 +8138,7 @@
 </p:sld>
 </file>
 
-<file path=ppt/slides/slide119.xml><?xml version="1.0" encoding="utf-8"?>
+<file path=ppt/slides/slide7.xml><?xml version="1.0" encoding="utf-8"?>
 <p:sld xmlns:a="http://schemas.openxmlformats.org/drawingml/2006/main" xmlns:r="http://schemas.openxmlformats.org/officeDocument/2006/relationships" xmlns:p="http://schemas.openxmlformats.org/presentationml/2006/main">
   <p:cSld>
     <p:spTree>
@@ -6586,7 +8410,7 @@
 </p:sld>
 </file>
 
-<file path=ppt/slides/slide120.xml><?xml version="1.0" encoding="utf-8"?>
+<file path=ppt/slides/slide8.xml><?xml version="1.0" encoding="utf-8"?>
 <p:sld xmlns:a="http://schemas.openxmlformats.org/drawingml/2006/main" xmlns:r="http://schemas.openxmlformats.org/officeDocument/2006/relationships" xmlns:p="http://schemas.openxmlformats.org/presentationml/2006/main">
   <p:cSld>
     <p:spTree>
@@ -6883,7 +8707,7 @@
 </p:sld>
 </file>
 
-<file path=ppt/slides/slide121.xml><?xml version="1.0" encoding="utf-8"?>
+<file path=ppt/slides/slide9.xml><?xml version="1.0" encoding="utf-8"?>
 <p:sld xmlns:a="http://schemas.openxmlformats.org/drawingml/2006/main" xmlns:r="http://schemas.openxmlformats.org/officeDocument/2006/relationships" xmlns:p="http://schemas.openxmlformats.org/presentationml/2006/main">
   <p:cSld>
     <p:spTree>
@@ -7137,1276 +8961,6 @@
             <a:pPr algn="r"/>
             <a:r>
               <a:t>121</a:t>
-            </a:r>
-            <a:endParaRPr sz="1000" b="1">
-              <a:solidFill>
-                <a:srgbClr val="7A8A6E"/>
-              </a:solidFill>
-              <a:latin typeface="Calibri"/>
-            </a:endParaRPr>
-          </a:p>
-        </p:txBody>
-      </p:sp>
-    </p:spTree>
-  </p:cSld>
-  <p:clrMapOvr>
-    <a:masterClrMapping/>
-  </p:clrMapOvr>
-</p:sld>
-</file>
-
-<file path=ppt/slides/slide122.xml><?xml version="1.0" encoding="utf-8"?>
-<p:sld xmlns:a="http://schemas.openxmlformats.org/drawingml/2006/main" xmlns:r="http://schemas.openxmlformats.org/officeDocument/2006/relationships" xmlns:p="http://schemas.openxmlformats.org/presentationml/2006/main">
-  <p:cSld>
-    <p:spTree>
-      <p:nvGrpSpPr>
-        <p:cNvPr id="1" name=""/>
-        <p:cNvGrpSpPr/>
-        <p:nvPr/>
-      </p:nvGrpSpPr>
-      <p:grpSpPr>
-        <a:xfrm>
-          <a:off x="0" y="0"/>
-          <a:ext cx="0" cy="0"/>
-          <a:chOff x="0" y="0"/>
-          <a:chExt cx="0" cy="0"/>
-        </a:xfrm>
-      </p:grpSpPr>
-      <p:sp>
-        <p:nvSpPr>
-          <p:cNvPr id="2" name="Rectangle 1"/>
-          <p:cNvSpPr/>
-          <p:nvPr/>
-        </p:nvSpPr>
-        <p:spPr>
-          <a:xfrm>
-            <a:off x="0" y="0"/>
-            <a:ext cx="12191695" cy="6858000"/>
-          </a:xfrm>
-          <a:prstGeom prst="rect">
-            <a:avLst/>
-          </a:prstGeom>
-          <a:solidFill>
-            <a:srgbClr val="FFFFFF"/>
-          </a:solidFill>
-          <a:ln>
-            <a:noFill/>
-          </a:ln>
-        </p:spPr>
-        <p:txBody>
-          <a:bodyPr/>
-          <a:lstStyle/>
-          <a:p>
-            <a:endParaRPr/>
-          </a:p>
-        </p:txBody>
-      </p:sp>
-      <p:sp>
-        <p:nvSpPr>
-          <p:cNvPr id="3" name="TextBox 2"/>
-          <p:cNvSpPr txBox="1"/>
-          <p:nvPr/>
-        </p:nvSpPr>
-        <p:spPr>
-          <a:xfrm>
-            <a:off x="822960" y="502920"/>
-            <a:ext cx="10515600" cy="822960"/>
-          </a:xfrm>
-          <a:prstGeom prst="rect">
-            <a:avLst/>
-          </a:prstGeom>
-          <a:noFill/>
-        </p:spPr>
-        <p:txBody>
-          <a:bodyPr wrap="square">
-            <a:spAutoFit/>
-          </a:bodyPr>
-          <a:lstStyle/>
-          <a:p>
-            <a:pPr algn="l">
-              <a:spcAft>
-                <a:spcPts val="600"/>
-              </a:spcAft>
-            </a:pPr>
-            <a:r>
-              <a:rPr sz="2800" b="1" i="0">
-                <a:solidFill>
-                  <a:srgbClr val="2C5F2D"/>
-                </a:solidFill>
-                <a:latin typeface="Cambria"/>
-              </a:rPr>
-              <a:t>Homework — Two Weeks, Four Parts</a:t>
-            </a:r>
-          </a:p>
-        </p:txBody>
-      </p:sp>
-      <p:sp>
-        <p:nvSpPr>
-          <p:cNvPr id="4" name="TextBox 4"/>
-          <p:cNvSpPr txBox="1"/>
-          <p:nvPr/>
-        </p:nvSpPr>
-        <p:spPr>
-          <a:xfrm>
-            <a:off x="822960" y="1554480"/>
-            <a:ext cx="6675120" cy="4892040"/>
-          </a:xfrm>
-          <a:prstGeom prst="rect">
-            <a:avLst/>
-          </a:prstGeom>
-          <a:noFill/>
-        </p:spPr>
-        <p:txBody>
-          <a:bodyPr wrap="square" lIns="91440" tIns="91440" rIns="91440" bIns="91440"/>
-          <a:lstStyle/>
-          <a:p>
-            <a:pPr marL="274320" indent="-274320">
-              <a:spcAft>
-                <a:spcPts val="750"/>
-              </a:spcAft>
-            </a:pPr>
-            <a:r>
-              <a:rPr sz="2000" b="1" i="0">
-                <a:solidFill>
-                  <a:srgbClr val="97BC62"/>
-                </a:solidFill>
-                <a:latin typeface="Calibri"/>
-              </a:rPr>
-              <a:t>•  </a:t>
-            </a:r>
-            <a:r>
-              <a:rPr sz="2000" b="0" i="0">
-                <a:solidFill>
-                  <a:srgbClr val="222B22"/>
-                </a:solidFill>
-                <a:latin typeface="Calibri"/>
-              </a:rPr>
-              <a:t>Three returns to the garden this week — five to ten minutes each, journaled</a:t>
-            </a:r>
-          </a:p>
-          <a:p>
-            <a:pPr marL="274320" indent="-274320">
-              <a:spcAft>
-                <a:spcPts val="750"/>
-              </a:spcAft>
-            </a:pPr>
-            <a:r>
-              <a:rPr sz="2000" b="1" i="0">
-                <a:solidFill>
-                  <a:srgbClr val="97BC62"/>
-                </a:solidFill>
-                <a:latin typeface="Calibri"/>
-              </a:rPr>
-              <a:t>•  </a:t>
-            </a:r>
-            <a:r>
-              <a:rPr sz="2000" b="0" i="0">
-                <a:solidFill>
-                  <a:srgbClr val="222B22"/>
-                </a:solidFill>
-                <a:latin typeface="Calibri"/>
-              </a:rPr>
-              <a:t>“You don’t need the full guided script — you have the place now. Just go back.”</a:t>
-            </a:r>
-          </a:p>
-          <a:p>
-            <a:pPr marL="274320" indent="-274320">
-              <a:spcAft>
-                <a:spcPts val="750"/>
-              </a:spcAft>
-            </a:pPr>
-            <a:r>
-              <a:rPr sz="2000" b="1" i="0">
-                <a:solidFill>
-                  <a:srgbClr val="97BC62"/>
-                </a:solidFill>
-                <a:latin typeface="Calibri"/>
-              </a:rPr>
-              <a:t>•  </a:t>
-            </a:r>
-            <a:r>
-              <a:rPr sz="2000" b="0" i="0">
-                <a:solidFill>
-                  <a:srgbClr val="222B22"/>
-                </a:solidFill>
-                <a:latin typeface="Calibri"/>
-              </a:rPr>
-              <a:t>Notice what is the same and what has changed — notice if Jesus is in a different place than He was tonight</a:t>
-            </a:r>
-          </a:p>
-          <a:p>
-            <a:pPr marL="274320" indent="-274320">
-              <a:spcAft>
-                <a:spcPts val="750"/>
-              </a:spcAft>
-            </a:pPr>
-            <a:r>
-              <a:rPr sz="2000" b="1" i="0">
-                <a:solidFill>
-                  <a:srgbClr val="97BC62"/>
-                </a:solidFill>
-                <a:latin typeface="Calibri"/>
-              </a:rPr>
-              <a:t>•  </a:t>
-            </a:r>
-            <a:r>
-              <a:rPr sz="2000" b="0" i="0">
-                <a:solidFill>
-                  <a:srgbClr val="222B22"/>
-                </a:solidFill>
-                <a:latin typeface="Calibri"/>
-              </a:rPr>
-              <a:t>Pick three days and a time — morning before the day starts is often best</a:t>
-            </a:r>
-          </a:p>
-          <a:p>
-            <a:pPr marL="274320" indent="-274320">
-              <a:spcAft>
-                <a:spcPts val="750"/>
-              </a:spcAft>
-            </a:pPr>
-            <a:r>
-              <a:rPr sz="2000" b="1" i="0">
-                <a:solidFill>
-                  <a:srgbClr val="97BC62"/>
-                </a:solidFill>
-                <a:latin typeface="Calibri"/>
-              </a:rPr>
-              <a:t>•  </a:t>
-            </a:r>
-            <a:r>
-              <a:rPr sz="2000" b="0" i="0">
-                <a:solidFill>
-                  <a:srgbClr val="222B22"/>
-                </a:solidFill>
-                <a:latin typeface="Calibri"/>
-              </a:rPr>
-              <a:t>If something heavy surfaces — stop, open your eyes, come back another day; tell a trusted adult</a:t>
-            </a:r>
-          </a:p>
-          <a:p>
-            <a:pPr marL="274320" indent="-274320">
-              <a:spcAft>
-                <a:spcPts val="750"/>
-              </a:spcAft>
-            </a:pPr>
-            <a:r>
-              <a:rPr sz="2000" b="1" i="0">
-                <a:solidFill>
-                  <a:srgbClr val="97BC62"/>
-                </a:solidFill>
-                <a:latin typeface="Calibri"/>
-              </a:rPr>
-              <a:t>•  </a:t>
-            </a:r>
-            <a:r>
-              <a:rPr sz="2000" b="0" i="0">
-                <a:solidFill>
-                  <a:srgbClr val="222B22"/>
-                </a:solidFill>
-                <a:latin typeface="Calibri"/>
-              </a:rPr>
-              <a:t>Came in skeptical? The Note for the Skeptic handout is for you — adapting or sitting out for now is okay</a:t>
-            </a:r>
-          </a:p>
-        </p:txBody>
-      </p:sp>
-      <p:sp>
-        <p:nvSpPr>
-          <p:cNvPr id="90" name="SlideNum"/>
-          <p:cNvSpPr txBox="1"/>
-          <p:nvPr/>
-        </p:nvSpPr>
-        <p:spPr>
-          <a:xfrm>
-            <a:off x="11384280" y="6446520"/>
-            <a:ext cx="640080" cy="292608"/>
-          </a:xfrm>
-          <a:prstGeom prst="rect">
-            <a:avLst/>
-          </a:prstGeom>
-          <a:noFill/>
-        </p:spPr>
-        <p:txBody>
-          <a:bodyPr wrap="none" lIns="0" tIns="0" rIns="45720" bIns="0" anchor="ctr"/>
-          <a:lstStyle/>
-          <a:p>
-            <a:pPr algn="r"/>
-            <a:r>
-              <a:t>122</a:t>
-            </a:r>
-            <a:endParaRPr sz="1000" b="1">
-              <a:solidFill>
-                <a:srgbClr val="7A8A6E"/>
-              </a:solidFill>
-              <a:latin typeface="Calibri"/>
-            </a:endParaRPr>
-          </a:p>
-        </p:txBody>
-      </p:sp>
-      <p:pic>
-        <p:nvPicPr>
-          <p:cNvPr id="33" name="Picture 33" descr="seedling - what grows between Wednesdays"/>
-          <p:cNvPicPr>
-            <a:picLocks noChangeAspect="1"/>
-          </p:cNvPicPr>
-          <p:nvPr/>
-        </p:nvPicPr>
-        <p:blipFill>
-          <a:blip r:embed="rId3"/>
-          <a:stretch>
-            <a:fillRect/>
-          </a:stretch>
-        </p:blipFill>
-        <p:spPr>
-          <a:xfrm>
-            <a:off x="8103612" y="1463040"/>
-            <a:ext cx="3262379" cy="4892040"/>
-          </a:xfrm>
-          <a:prstGeom prst="rect">
-            <a:avLst/>
-          </a:prstGeom>
-          <a:ln w="76200">
-            <a:solidFill>
-              <a:srgbClr val="FFFFFF"/>
-            </a:solidFill>
-          </a:ln>
-          <a:effectLst>
-            <a:outerShdw blurRad="63500" dist="25400" dir="5400000" rotWithShape="0">
-              <a:srgbClr val="000000">
-                <a:alpha val="35000"/>
-              </a:srgbClr>
-            </a:outerShdw>
-          </a:effectLst>
-        </p:spPr>
-      </p:pic>
-    </p:spTree>
-  </p:cSld>
-  <p:clrMapOvr>
-    <a:masterClrMapping/>
-  </p:clrMapOvr>
-</p:sld>
-</file>
-
-<file path=ppt/slides/slide123.xml><?xml version="1.0" encoding="utf-8"?>
-<p:sld xmlns:a="http://schemas.openxmlformats.org/drawingml/2006/main" xmlns:r="http://schemas.openxmlformats.org/officeDocument/2006/relationships" xmlns:p="http://schemas.openxmlformats.org/presentationml/2006/main">
-  <p:cSld>
-    <p:spTree>
-      <p:nvGrpSpPr>
-        <p:cNvPr id="1" name=""/>
-        <p:cNvGrpSpPr/>
-        <p:nvPr/>
-      </p:nvGrpSpPr>
-      <p:grpSpPr>
-        <a:xfrm>
-          <a:off x="0" y="0"/>
-          <a:ext cx="0" cy="0"/>
-          <a:chOff x="0" y="0"/>
-          <a:chExt cx="0" cy="0"/>
-        </a:xfrm>
-      </p:grpSpPr>
-      <p:sp>
-        <p:nvSpPr>
-          <p:cNvPr id="2" name="Rectangle 1"/>
-          <p:cNvSpPr/>
-          <p:nvPr/>
-        </p:nvSpPr>
-        <p:spPr>
-          <a:xfrm>
-            <a:off x="0" y="0"/>
-            <a:ext cx="12191695" cy="6858000"/>
-          </a:xfrm>
-          <a:prstGeom prst="rect">
-            <a:avLst/>
-          </a:prstGeom>
-          <a:solidFill>
-            <a:srgbClr val="FFFFFF"/>
-          </a:solidFill>
-          <a:ln>
-            <a:noFill/>
-          </a:ln>
-        </p:spPr>
-        <p:txBody>
-          <a:bodyPr/>
-          <a:lstStyle/>
-          <a:p>
-            <a:endParaRPr/>
-          </a:p>
-        </p:txBody>
-      </p:sp>
-      <p:sp>
-        <p:nvSpPr>
-          <p:cNvPr id="3" name="TextBox 2"/>
-          <p:cNvSpPr txBox="1"/>
-          <p:nvPr/>
-        </p:nvSpPr>
-        <p:spPr>
-          <a:xfrm>
-            <a:off x="822960" y="502920"/>
-            <a:ext cx="10515600" cy="822960"/>
-          </a:xfrm>
-          <a:prstGeom prst="rect">
-            <a:avLst/>
-          </a:prstGeom>
-          <a:noFill/>
-        </p:spPr>
-        <p:txBody>
-          <a:bodyPr wrap="square">
-            <a:spAutoFit/>
-          </a:bodyPr>
-          <a:lstStyle/>
-          <a:p>
-            <a:pPr algn="l">
-              <a:spcAft>
-                <a:spcPts val="600"/>
-              </a:spcAft>
-            </a:pPr>
-            <a:r>
-              <a:rPr sz="2800" b="1" i="0">
-                <a:solidFill>
-                  <a:srgbClr val="2C5F2D"/>
-                </a:solidFill>
-                <a:latin typeface="Cambria"/>
-              </a:rPr>
-              <a:t>Your Take-Home Card — This Session’s Practice</a:t>
-            </a:r>
-          </a:p>
-        </p:txBody>
-      </p:sp>
-      <p:sp>
-        <p:nvSpPr>
-          <p:cNvPr id="90" name="SlideNum"/>
-          <p:cNvSpPr txBox="1"/>
-          <p:nvPr/>
-        </p:nvSpPr>
-        <p:spPr>
-          <a:xfrm>
-            <a:off x="11384280" y="6446520"/>
-            <a:ext cx="640080" cy="292608"/>
-          </a:xfrm>
-          <a:prstGeom prst="rect">
-            <a:avLst/>
-          </a:prstGeom>
-          <a:noFill/>
-        </p:spPr>
-        <p:txBody>
-          <a:bodyPr wrap="none" lIns="0" tIns="0" rIns="45720" bIns="0" anchor="ctr"/>
-          <a:lstStyle/>
-          <a:p>
-            <a:pPr algn="r"/>
-            <a:r>
-              <a:t>123</a:t>
-            </a:r>
-            <a:endParaRPr sz="1000" b="1">
-              <a:solidFill>
-                <a:srgbClr val="7A8A6E"/>
-              </a:solidFill>
-              <a:latin typeface="Calibri"/>
-            </a:endParaRPr>
-          </a:p>
-        </p:txBody>
-      </p:sp>
-      <p:pic>
-        <p:nvPicPr>
-          <p:cNvPr id="270" name="CardImage" descr="the Week 9 check-off card, as handed out"/>
-          <p:cNvPicPr>
-            <a:picLocks noChangeAspect="1"/>
-          </p:cNvPicPr>
-          <p:nvPr/>
-        </p:nvPicPr>
-        <p:blipFill>
-          <a:blip r:embed="rId3"/>
-          <a:stretch>
-            <a:fillRect/>
-          </a:stretch>
-        </p:blipFill>
-        <p:spPr>
-          <a:xfrm>
-            <a:off x="1339945" y="1554480"/>
-            <a:ext cx="9511803" cy="4480560"/>
-          </a:xfrm>
-          <a:prstGeom prst="rect">
-            <a:avLst/>
-          </a:prstGeom>
-          <a:ln w="76200">
-            <a:solidFill>
-              <a:srgbClr val="FFFFFF"/>
-            </a:solidFill>
-          </a:ln>
-          <a:effectLst>
-            <a:outerShdw blurRad="63500" dist="25400" dir="5400000" rotWithShape="0">
-              <a:srgbClr val="000000">
-                <a:alpha val="35000"/>
-              </a:srgbClr>
-            </a:outerShdw>
-          </a:effectLst>
-        </p:spPr>
-      </p:pic>
-      <p:sp>
-        <p:nvSpPr>
-          <p:cNvPr id="271" name="Caption"/>
-          <p:cNvSpPr txBox="1"/>
-          <p:nvPr/>
-        </p:nvSpPr>
-        <p:spPr>
-          <a:xfrm>
-            <a:off x="822960" y="6217920"/>
-            <a:ext cx="10515600" cy="457200"/>
-          </a:xfrm>
-          <a:prstGeom prst="rect">
-            <a:avLst/>
-          </a:prstGeom>
-          <a:noFill/>
-        </p:spPr>
-        <p:txBody>
-          <a:bodyPr wrap="square"/>
-          <a:lstStyle/>
-          <a:p>
-            <a:pPr algn="ctr"/>
-            <a:r>
-              <a:rPr sz="1800" b="0" i="1">
-                <a:solidFill>
-                  <a:srgbClr val="222B22"/>
-                </a:solidFill>
-                <a:latin typeface="Calibri"/>
-              </a:rPr>
-              <a:t>Handed out now — fridge, mirror, journal pocket.</a:t>
-            </a:r>
-          </a:p>
-        </p:txBody>
-      </p:sp>
-    </p:spTree>
-  </p:cSld>
-  <p:clrMapOvr>
-    <a:masterClrMapping/>
-  </p:clrMapOvr>
-</p:sld>
-</file>
-
-<file path=ppt/slides/slide124.xml><?xml version="1.0" encoding="utf-8"?>
-<p:sld xmlns:a="http://schemas.openxmlformats.org/drawingml/2006/main" xmlns:r="http://schemas.openxmlformats.org/officeDocument/2006/relationships" xmlns:p="http://schemas.openxmlformats.org/presentationml/2006/main">
-  <p:cSld>
-    <p:spTree>
-      <p:nvGrpSpPr>
-        <p:cNvPr id="1" name=""/>
-        <p:cNvGrpSpPr/>
-        <p:nvPr/>
-      </p:nvGrpSpPr>
-      <p:grpSpPr>
-        <a:xfrm>
-          <a:off x="0" y="0"/>
-          <a:ext cx="0" cy="0"/>
-          <a:chOff x="0" y="0"/>
-          <a:chExt cx="0" cy="0"/>
-        </a:xfrm>
-      </p:grpSpPr>
-      <p:sp>
-        <p:nvSpPr>
-          <p:cNvPr id="2" name="Rectangle 1"/>
-          <p:cNvSpPr/>
-          <p:nvPr/>
-        </p:nvSpPr>
-        <p:spPr>
-          <a:xfrm>
-            <a:off x="0" y="0"/>
-            <a:ext cx="12191695" cy="6858000"/>
-          </a:xfrm>
-          <a:prstGeom prst="rect">
-            <a:avLst/>
-          </a:prstGeom>
-          <a:solidFill>
-            <a:srgbClr val="FFFFFF"/>
-          </a:solidFill>
-          <a:ln>
-            <a:noFill/>
-          </a:ln>
-        </p:spPr>
-        <p:txBody>
-          <a:bodyPr/>
-          <a:lstStyle/>
-          <a:p>
-            <a:endParaRPr/>
-          </a:p>
-        </p:txBody>
-      </p:sp>
-      <p:sp>
-        <p:nvSpPr>
-          <p:cNvPr id="3" name="TextBox 2"/>
-          <p:cNvSpPr txBox="1"/>
-          <p:nvPr/>
-        </p:nvSpPr>
-        <p:spPr>
-          <a:xfrm>
-            <a:off x="822960" y="502920"/>
-            <a:ext cx="10515600" cy="822960"/>
-          </a:xfrm>
-          <a:prstGeom prst="rect">
-            <a:avLst/>
-          </a:prstGeom>
-          <a:noFill/>
-        </p:spPr>
-        <p:txBody>
-          <a:bodyPr wrap="square">
-            <a:spAutoFit/>
-          </a:bodyPr>
-          <a:lstStyle/>
-          <a:p>
-            <a:pPr algn="l">
-              <a:spcAft>
-                <a:spcPts val="600"/>
-              </a:spcAft>
-            </a:pPr>
-            <a:r>
-              <a:rPr sz="2800" b="1" i="0">
-                <a:solidFill>
-                  <a:srgbClr val="2C5F2D"/>
-                </a:solidFill>
-                <a:latin typeface="Cambria"/>
-              </a:rPr>
-              <a:t>The Leader Feedback Round</a:t>
-            </a:r>
-          </a:p>
-        </p:txBody>
-      </p:sp>
-      <p:sp>
-        <p:nvSpPr>
-          <p:cNvPr id="4" name="TextBox 4"/>
-          <p:cNvSpPr txBox="1"/>
-          <p:nvPr/>
-        </p:nvSpPr>
-        <p:spPr>
-          <a:xfrm>
-            <a:off x="822960" y="1554480"/>
-            <a:ext cx="6675120" cy="4892040"/>
-          </a:xfrm>
-          <a:prstGeom prst="rect">
-            <a:avLst/>
-          </a:prstGeom>
-          <a:noFill/>
-        </p:spPr>
-        <p:txBody>
-          <a:bodyPr wrap="square" lIns="91440" tIns="91440" rIns="91440" bIns="91440"/>
-          <a:lstStyle/>
-          <a:p>
-            <a:pPr marL="274320" indent="-274320">
-              <a:spcAft>
-                <a:spcPts val="900"/>
-              </a:spcAft>
-            </a:pPr>
-            <a:r>
-              <a:rPr sz="2800" b="1" i="0">
-                <a:solidFill>
-                  <a:srgbClr val="97BC62"/>
-                </a:solidFill>
-                <a:latin typeface="Calibri"/>
-              </a:rPr>
-              <a:t>•  </a:t>
-            </a:r>
-            <a:r>
-              <a:rPr sz="2800" b="0" i="0">
-                <a:solidFill>
-                  <a:srgbClr val="222B22"/>
-                </a:solidFill>
-                <a:latin typeface="Calibri"/>
-              </a:rPr>
-              <a:t>Two rounds, same as every session — the container holder first, then the content presenter: three things each</a:t>
-            </a:r>
-          </a:p>
-          <a:p>
-            <a:pPr marL="685800" indent="-274320">
-              <a:spcAft>
-                <a:spcPts val="700"/>
-              </a:spcAft>
-            </a:pPr>
-            <a:r>
-              <a:rPr sz="2000" b="1" i="0">
-                <a:solidFill>
-                  <a:srgbClr val="97BC62"/>
-                </a:solidFill>
-                <a:latin typeface="Calibri"/>
-              </a:rPr>
-              <a:t>–  </a:t>
-            </a:r>
-            <a:r>
-              <a:rPr sz="2000" b="0" i="1">
-                <a:solidFill>
-                  <a:srgbClr val="222B22"/>
-                </a:solidFill>
-                <a:latin typeface="Calibri"/>
-              </a:rPr>
-              <a:t>“What I think went well tonight: ______”</a:t>
-            </a:r>
-          </a:p>
-          <a:p>
-            <a:pPr marL="685800" indent="-274320">
-              <a:spcAft>
-                <a:spcPts val="700"/>
-              </a:spcAft>
-            </a:pPr>
-            <a:r>
-              <a:rPr sz="2000" b="1" i="0">
-                <a:solidFill>
-                  <a:srgbClr val="97BC62"/>
-                </a:solidFill>
-                <a:latin typeface="Calibri"/>
-              </a:rPr>
-              <a:t>–  </a:t>
-            </a:r>
-            <a:r>
-              <a:rPr sz="2000" b="0" i="1">
-                <a:solidFill>
-                  <a:srgbClr val="222B22"/>
-                </a:solidFill>
-                <a:latin typeface="Calibri"/>
-              </a:rPr>
-              <a:t>“What I’d do differently next time: ______”</a:t>
-            </a:r>
-          </a:p>
-          <a:p>
-            <a:pPr marL="685800" indent="-274320">
-              <a:spcAft>
-                <a:spcPts val="700"/>
-              </a:spcAft>
-            </a:pPr>
-            <a:r>
-              <a:rPr sz="2000" b="1" i="0">
-                <a:solidFill>
-                  <a:srgbClr val="97BC62"/>
-                </a:solidFill>
-                <a:latin typeface="Calibri"/>
-              </a:rPr>
-              <a:t>–  </a:t>
-            </a:r>
-            <a:r>
-              <a:rPr sz="2000" b="0" i="1">
-                <a:solidFill>
-                  <a:srgbClr val="222B22"/>
-                </a:solidFill>
-                <a:latin typeface="Calibri"/>
-              </a:rPr>
-              <a:t>“If I were to teach tonight’s process to someone, I would tell them: ______”</a:t>
-            </a:r>
-          </a:p>
-          <a:p>
-            <a:pPr marL="274320" indent="-274320">
-              <a:spcAft>
-                <a:spcPts val="900"/>
-              </a:spcAft>
-            </a:pPr>
-            <a:r>
-              <a:rPr sz="2800" b="1" i="0">
-                <a:solidFill>
-                  <a:srgbClr val="97BC62"/>
-                </a:solidFill>
-                <a:latin typeface="Calibri"/>
-              </a:rPr>
-              <a:t>•  </a:t>
-            </a:r>
-            <a:r>
-              <a:rPr sz="2800" b="0" i="0">
-                <a:solidFill>
-                  <a:srgbClr val="222B22"/>
-                </a:solidFill>
-                <a:latin typeface="Calibri"/>
-              </a:rPr>
-              <a:t>Then the room — the same two questions about tonight</a:t>
-            </a:r>
-          </a:p>
-          <a:p>
-            <a:pPr marL="274320" indent="-274320">
-              <a:spcAft>
-                <a:spcPts val="900"/>
-              </a:spcAft>
-            </a:pPr>
-            <a:r>
-              <a:rPr sz="2800" b="1" i="0">
-                <a:solidFill>
-                  <a:srgbClr val="97BC62"/>
-                </a:solidFill>
-                <a:latin typeface="Calibri"/>
-              </a:rPr>
-              <a:t>•  </a:t>
-            </a:r>
-            <a:r>
-              <a:rPr sz="2800" b="0" i="0">
-                <a:solidFill>
-                  <a:srgbClr val="222B22"/>
-                </a:solidFill>
-                <a:latin typeface="Calibri"/>
-              </a:rPr>
-              <a:t>The leaders receive without defending — “thank you” is the whole response</a:t>
-            </a:r>
-          </a:p>
-        </p:txBody>
-      </p:sp>
-      <p:sp>
-        <p:nvSpPr>
-          <p:cNvPr id="90" name="SlideNum"/>
-          <p:cNvSpPr txBox="1"/>
-          <p:nvPr/>
-        </p:nvSpPr>
-        <p:spPr>
-          <a:xfrm>
-            <a:off x="11384280" y="6446520"/>
-            <a:ext cx="640080" cy="292608"/>
-          </a:xfrm>
-          <a:prstGeom prst="rect">
-            <a:avLst/>
-          </a:prstGeom>
-          <a:noFill/>
-        </p:spPr>
-        <p:txBody>
-          <a:bodyPr wrap="none" lIns="0" tIns="0" rIns="45720" bIns="0" anchor="ctr"/>
-          <a:lstStyle/>
-          <a:p>
-            <a:pPr algn="r"/>
-            <a:r>
-              <a:t>124</a:t>
-            </a:r>
-            <a:endParaRPr sz="1000" b="1">
-              <a:solidFill>
-                <a:srgbClr val="7A8A6E"/>
-              </a:solidFill>
-              <a:latin typeface="Calibri"/>
-            </a:endParaRPr>
-          </a:p>
-        </p:txBody>
-      </p:sp>
-      <p:pic>
-        <p:nvPicPr>
-          <p:cNvPr id="33" name="Picture 33" descr="compass on the trail - the weekly bearing check"/>
-          <p:cNvPicPr>
-            <a:picLocks noChangeAspect="1"/>
-          </p:cNvPicPr>
-          <p:nvPr/>
-        </p:nvPicPr>
-        <p:blipFill>
-          <a:blip r:embed="rId3"/>
-          <a:stretch>
-            <a:fillRect/>
-          </a:stretch>
-        </p:blipFill>
-        <p:spPr>
-          <a:xfrm>
-            <a:off x="8106160" y="1463040"/>
-            <a:ext cx="3259831" cy="4892040"/>
-          </a:xfrm>
-          <a:prstGeom prst="rect">
-            <a:avLst/>
-          </a:prstGeom>
-          <a:ln w="76200">
-            <a:solidFill>
-              <a:srgbClr val="FFFFFF"/>
-            </a:solidFill>
-          </a:ln>
-          <a:effectLst>
-            <a:outerShdw blurRad="63500" dist="25400" dir="5400000" rotWithShape="0">
-              <a:srgbClr val="000000">
-                <a:alpha val="35000"/>
-              </a:srgbClr>
-            </a:outerShdw>
-          </a:effectLst>
-        </p:spPr>
-      </p:pic>
-    </p:spTree>
-  </p:cSld>
-  <p:clrMapOvr>
-    <a:masterClrMapping/>
-  </p:clrMapOvr>
-</p:sld>
-</file>
-
-<file path=ppt/slides/slide125.xml><?xml version="1.0" encoding="utf-8"?>
-<p:sld xmlns:a="http://schemas.openxmlformats.org/drawingml/2006/main" xmlns:r="http://schemas.openxmlformats.org/officeDocument/2006/relationships" xmlns:p="http://schemas.openxmlformats.org/presentationml/2006/main">
-  <p:cSld>
-    <p:spTree>
-      <p:nvGrpSpPr>
-        <p:cNvPr id="1" name=""/>
-        <p:cNvGrpSpPr/>
-        <p:nvPr/>
-      </p:nvGrpSpPr>
-      <p:grpSpPr>
-        <a:xfrm>
-          <a:off x="0" y="0"/>
-          <a:ext cx="0" cy="0"/>
-          <a:chOff x="0" y="0"/>
-          <a:chExt cx="0" cy="0"/>
-        </a:xfrm>
-      </p:grpSpPr>
-      <p:sp>
-        <p:nvSpPr>
-          <p:cNvPr id="2" name="Rectangle 1"/>
-          <p:cNvSpPr/>
-          <p:nvPr/>
-        </p:nvSpPr>
-        <p:spPr>
-          <a:xfrm>
-            <a:off x="0" y="0"/>
-            <a:ext cx="12191695" cy="6858000"/>
-          </a:xfrm>
-          <a:prstGeom prst="rect">
-            <a:avLst/>
-          </a:prstGeom>
-          <a:solidFill>
-            <a:srgbClr val="FFFFFF"/>
-          </a:solidFill>
-          <a:ln>
-            <a:noFill/>
-          </a:ln>
-        </p:spPr>
-        <p:txBody>
-          <a:bodyPr/>
-          <a:lstStyle/>
-          <a:p>
-            <a:endParaRPr/>
-          </a:p>
-        </p:txBody>
-      </p:sp>
-      <p:sp>
-        <p:nvSpPr>
-          <p:cNvPr id="3" name="TextBox 2"/>
-          <p:cNvSpPr txBox="1"/>
-          <p:nvPr/>
-        </p:nvSpPr>
-        <p:spPr>
-          <a:xfrm>
-            <a:off x="822960" y="502920"/>
-            <a:ext cx="10515600" cy="822960"/>
-          </a:xfrm>
-          <a:prstGeom prst="rect">
-            <a:avLst/>
-          </a:prstGeom>
-          <a:noFill/>
-        </p:spPr>
-        <p:txBody>
-          <a:bodyPr wrap="square">
-            <a:spAutoFit/>
-          </a:bodyPr>
-          <a:lstStyle/>
-          <a:p>
-            <a:pPr algn="l">
-              <a:spcAft>
-                <a:spcPts val="600"/>
-              </a:spcAft>
-            </a:pPr>
-            <a:r>
-              <a:rPr sz="2800" b="1" i="0">
-                <a:solidFill>
-                  <a:srgbClr val="2C5F2D"/>
-                </a:solidFill>
-                <a:latin typeface="Cambria"/>
-              </a:rPr>
-              <a:t>Closing the Container + Aaronic Blessing</a:t>
-            </a:r>
-          </a:p>
-        </p:txBody>
-      </p:sp>
-      <p:sp>
-        <p:nvSpPr>
-          <p:cNvPr id="4" name="TextBox 4"/>
-          <p:cNvSpPr txBox="1"/>
-          <p:nvPr/>
-        </p:nvSpPr>
-        <p:spPr>
-          <a:xfrm>
-            <a:off x="822960" y="1600200"/>
-            <a:ext cx="5669280" cy="4572000"/>
-          </a:xfrm>
-          <a:prstGeom prst="rect">
-            <a:avLst/>
-          </a:prstGeom>
-          <a:noFill/>
-        </p:spPr>
-        <p:txBody>
-          <a:bodyPr wrap="square" lIns="91440" tIns="91440" rIns="91440" bIns="91440"/>
-          <a:lstStyle/>
-          <a:p>
-            <a:pPr marL="274320" indent="-274320">
-              <a:spcAft>
-                <a:spcPts val="900"/>
-              </a:spcAft>
-            </a:pPr>
-            <a:r>
-              <a:rPr sz="2200" b="1" i="0">
-                <a:solidFill>
-                  <a:srgbClr val="97BC62"/>
-                </a:solidFill>
-                <a:latin typeface="Calibri"/>
-              </a:rPr>
-              <a:t>•  </a:t>
-            </a:r>
-            <a:r>
-              <a:rPr sz="2200" b="0" i="0">
-                <a:solidFill>
-                  <a:srgbClr val="222B22"/>
-                </a:solidFill>
-                <a:latin typeface="Calibri"/>
-              </a:rPr>
-              <a:t>We close the way we opened — the container, six steps:</a:t>
-            </a:r>
-          </a:p>
-          <a:p>
-            <a:pPr marL="685800" indent="-274320">
-              <a:spcAft>
-                <a:spcPts val="700"/>
-              </a:spcAft>
-            </a:pPr>
-            <a:r>
-              <a:rPr sz="2000" b="1" i="0">
-                <a:solidFill>
-                  <a:srgbClr val="97BC62"/>
-                </a:solidFill>
-                <a:latin typeface="Calibri"/>
-              </a:rPr>
-              <a:t>1   </a:t>
-            </a:r>
-            <a:r>
-              <a:rPr sz="2000" b="0" i="0">
-                <a:solidFill>
-                  <a:srgbClr val="222B22"/>
-                </a:solidFill>
-                <a:latin typeface="Calibri"/>
-              </a:rPr>
-              <a:t>Stand again — same circle, same posture as the open</a:t>
-            </a:r>
-          </a:p>
-          <a:p>
-            <a:pPr marL="685800" indent="-274320">
-              <a:spcAft>
-                <a:spcPts val="700"/>
-              </a:spcAft>
-            </a:pPr>
-            <a:r>
-              <a:rPr sz="2000" b="1" i="0">
-                <a:solidFill>
-                  <a:srgbClr val="97BC62"/>
-                </a:solidFill>
-                <a:latin typeface="Calibri"/>
-              </a:rPr>
-              <a:t>2   </a:t>
-            </a:r>
-            <a:r>
-              <a:rPr sz="2000" b="0" i="0">
-                <a:solidFill>
-                  <a:srgbClr val="222B22"/>
-                </a:solidFill>
-                <a:latin typeface="Calibri"/>
-              </a:rPr>
-              <a:t>One-word landing — compare it to your opening word</a:t>
-            </a:r>
-          </a:p>
-          <a:p>
-            <a:pPr marL="685800" indent="-274320">
-              <a:spcAft>
-                <a:spcPts val="700"/>
-              </a:spcAft>
-            </a:pPr>
-            <a:r>
-              <a:rPr sz="2000" b="1" i="0">
-                <a:solidFill>
-                  <a:srgbClr val="97BC62"/>
-                </a:solidFill>
-                <a:latin typeface="Calibri"/>
-              </a:rPr>
-              <a:t>3   </a:t>
-            </a:r>
-            <a:r>
-              <a:rPr sz="2000" b="0" i="0">
-                <a:solidFill>
-                  <a:srgbClr val="222B22"/>
-                </a:solidFill>
-                <a:latin typeface="Calibri"/>
-              </a:rPr>
-              <a:t>The one thing you are taking from tonight</a:t>
-            </a:r>
-          </a:p>
-          <a:p>
-            <a:pPr marL="685800" indent="-274320">
-              <a:spcAft>
-                <a:spcPts val="700"/>
-              </a:spcAft>
-            </a:pPr>
-            <a:r>
-              <a:rPr sz="2000" b="1" i="0">
-                <a:solidFill>
-                  <a:srgbClr val="97BC62"/>
-                </a:solidFill>
-                <a:latin typeface="Calibri"/>
-              </a:rPr>
-              <a:t>4   </a:t>
-            </a:r>
-            <a:r>
-              <a:rPr sz="2000" b="0" i="0">
-                <a:solidFill>
-                  <a:srgbClr val="222B22"/>
-                </a:solidFill>
-                <a:latin typeface="Calibri"/>
-              </a:rPr>
-              <a:t>The one practice — committed aloud, or modified to one you will actually keep</a:t>
-            </a:r>
-          </a:p>
-          <a:p>
-            <a:pPr marL="685800" indent="-274320">
-              <a:spcAft>
-                <a:spcPts val="700"/>
-              </a:spcAft>
-            </a:pPr>
-            <a:r>
-              <a:rPr sz="2000" b="1" i="0">
-                <a:solidFill>
-                  <a:srgbClr val="97BC62"/>
-                </a:solidFill>
-                <a:latin typeface="Calibri"/>
-              </a:rPr>
-              <a:t>5   </a:t>
-            </a:r>
-            <a:r>
-              <a:rPr sz="2000" b="0" i="0">
-                <a:solidFill>
-                  <a:srgbClr val="222B22"/>
-                </a:solidFill>
-                <a:latin typeface="Calibri"/>
-              </a:rPr>
-              <a:t>Blessings — specific, witnessed, short</a:t>
-            </a:r>
-          </a:p>
-          <a:p>
-            <a:pPr marL="685800" indent="-274320">
-              <a:spcAft>
-                <a:spcPts val="700"/>
-              </a:spcAft>
-            </a:pPr>
-            <a:r>
-              <a:rPr sz="2000" b="1" i="0">
-                <a:solidFill>
-                  <a:srgbClr val="97BC62"/>
-                </a:solidFill>
-                <a:latin typeface="Calibri"/>
-              </a:rPr>
-              <a:t>6   </a:t>
-            </a:r>
-            <a:r>
-              <a:rPr sz="2000" b="0" i="0">
-                <a:solidFill>
-                  <a:srgbClr val="222B22"/>
-                </a:solidFill>
-                <a:latin typeface="Calibri"/>
-              </a:rPr>
-              <a:t>Closing prayer — and the Aaronic blessing, spoken over each other, face to face</a:t>
-            </a:r>
-          </a:p>
-        </p:txBody>
-      </p:sp>
-      <p:sp>
-        <p:nvSpPr>
-          <p:cNvPr id="6" name="TextBox 6"/>
-          <p:cNvSpPr txBox="1"/>
-          <p:nvPr/>
-        </p:nvSpPr>
-        <p:spPr>
-          <a:xfrm>
-            <a:off x="6766560" y="1737360"/>
-            <a:ext cx="4663440" cy="2926080"/>
-          </a:xfrm>
-          <a:prstGeom prst="rect">
-            <a:avLst/>
-          </a:prstGeom>
-          <a:solidFill>
-            <a:srgbClr val="F1F6EC"/>
-          </a:solidFill>
-        </p:spPr>
-        <p:txBody>
-          <a:bodyPr wrap="square" lIns="91440" tIns="91440" rIns="91440" bIns="91440" anchor="ctr"/>
-          <a:lstStyle/>
-          <a:p>
-            <a:pPr>
-              <a:spcAft>
-                <a:spcPts val="900"/>
-              </a:spcAft>
-            </a:pPr>
-            <a:r>
-              <a:rPr sz="1200" b="1" i="0">
-                <a:solidFill>
-                  <a:srgbClr val="97BC62"/>
-                </a:solidFill>
-                <a:latin typeface="Calibri"/>
-              </a:rPr>
-              <a:t>THE AARONIC BLESSING — NUMBERS 6:24–26</a:t>
-            </a:r>
-          </a:p>
-          <a:p>
-            <a:pPr>
-              <a:spcAft>
-                <a:spcPts val="600"/>
-              </a:spcAft>
-            </a:pPr>
-            <a:r>
-              <a:rPr sz="2400" b="0" i="1">
-                <a:solidFill>
-                  <a:srgbClr val="222B22"/>
-                </a:solidFill>
-                <a:latin typeface="Cambria"/>
-              </a:rPr>
-              <a:t>“The Lord bless you and keep you;</a:t>
-            </a:r>
-          </a:p>
-          <a:p>
-            <a:pPr>
-              <a:spcAft>
-                <a:spcPts val="600"/>
-              </a:spcAft>
-            </a:pPr>
-            <a:r>
-              <a:rPr sz="2400" b="0" i="1">
-                <a:solidFill>
-                  <a:srgbClr val="222B22"/>
-                </a:solidFill>
-                <a:latin typeface="Cambria"/>
-              </a:rPr>
-              <a:t>the Lord make his face to shine upon you, and be gracious to you;</a:t>
-            </a:r>
-          </a:p>
-          <a:p>
-            <a:pPr>
-              <a:spcAft>
-                <a:spcPts val="600"/>
-              </a:spcAft>
-            </a:pPr>
-            <a:r>
-              <a:rPr sz="2400" b="0" i="1">
-                <a:solidFill>
-                  <a:srgbClr val="222B22"/>
-                </a:solidFill>
-                <a:latin typeface="Cambria"/>
-              </a:rPr>
-              <a:t>the Lord lift up his countenance upon you, and give you peace.”</a:t>
-            </a:r>
-          </a:p>
-        </p:txBody>
-      </p:sp>
-      <p:sp>
-        <p:nvSpPr>
-          <p:cNvPr id="90" name="SlideNum"/>
-          <p:cNvSpPr txBox="1"/>
-          <p:nvPr/>
-        </p:nvSpPr>
-        <p:spPr>
-          <a:xfrm>
-            <a:off x="11384280" y="6446520"/>
-            <a:ext cx="640080" cy="292608"/>
-          </a:xfrm>
-          <a:prstGeom prst="rect">
-            <a:avLst/>
-          </a:prstGeom>
-          <a:noFill/>
-        </p:spPr>
-        <p:txBody>
-          <a:bodyPr wrap="none" lIns="0" tIns="0" rIns="45720" bIns="0" anchor="ctr"/>
-          <a:lstStyle/>
-          <a:p>
-            <a:pPr algn="r"/>
-            <a:r>
-              <a:t>125</a:t>
             </a:r>
             <a:endParaRPr sz="1000" b="1">
               <a:solidFill>

--- a/_implementation-notes/evening-series/FotH Evening Session 9 Slides DRAFT v1.pptx
+++ b/_implementation-notes/evening-series/FotH Evening Session 9 Slides DRAFT v1.pptx
@@ -4861,6 +4861,278 @@
                 </a:solidFill>
                 <a:latin typeface="Cambria"/>
               </a:rPr>
+              <a:t>Merge and One-Word Landing</a:t>
+            </a:r>
+          </a:p>
+        </p:txBody>
+      </p:sp>
+      <p:sp>
+        <p:nvSpPr>
+          <p:cNvPr id="4" name="TextBox 4"/>
+          <p:cNvSpPr txBox="1"/>
+          <p:nvPr/>
+        </p:nvSpPr>
+        <p:spPr>
+          <a:xfrm>
+            <a:off x="822960" y="1554480"/>
+            <a:ext cx="10515600" cy="4892040"/>
+          </a:xfrm>
+          <a:prstGeom prst="rect">
+            <a:avLst/>
+          </a:prstGeom>
+          <a:noFill/>
+        </p:spPr>
+        <p:txBody>
+          <a:bodyPr wrap="square" lIns="91440" tIns="91440" rIns="91440" bIns="91440"/>
+          <a:lstStyle/>
+          <a:p>
+            <a:pPr marL="274320" indent="-274320">
+              <a:spcAft>
+                <a:spcPts val="900"/>
+              </a:spcAft>
+            </a:pPr>
+            <a:r>
+              <a:rPr sz="2800" b="1" i="0">
+                <a:solidFill>
+                  <a:srgbClr val="97BC62"/>
+                </a:solidFill>
+                <a:latin typeface="Calibri"/>
+              </a:rPr>
+              <a:t>•  </a:t>
+            </a:r>
+            <a:r>
+              <a:rPr sz="2800" b="0" i="0">
+                <a:solidFill>
+                  <a:srgbClr val="222B22"/>
+                </a:solidFill>
+                <a:latin typeface="Calibri"/>
+              </a:rPr>
+              <a:t>“What happened in your pair stays in your pair.”</a:t>
+            </a:r>
+          </a:p>
+          <a:p>
+            <a:pPr marL="274320" indent="-274320">
+              <a:spcAft>
+                <a:spcPts val="900"/>
+              </a:spcAft>
+            </a:pPr>
+            <a:r>
+              <a:rPr sz="2800" b="1" i="0">
+                <a:solidFill>
+                  <a:srgbClr val="97BC62"/>
+                </a:solidFill>
+                <a:latin typeface="Calibri"/>
+              </a:rPr>
+              <a:t>•  </a:t>
+            </a:r>
+            <a:r>
+              <a:rPr sz="2800" b="0" i="0">
+                <a:solidFill>
+                  <a:srgbClr val="222B22"/>
+                </a:solidFill>
+                <a:latin typeface="Calibri"/>
+              </a:rPr>
+              <a:t>One word about tonight — not what was said, but what you noticed</a:t>
+            </a:r>
+          </a:p>
+          <a:p>
+            <a:pPr marL="685800" indent="-274320">
+              <a:spcAft>
+                <a:spcPts val="700"/>
+              </a:spcAft>
+            </a:pPr>
+            <a:r>
+              <a:rPr sz="2000" b="1" i="0">
+                <a:solidFill>
+                  <a:srgbClr val="97BC62"/>
+                </a:solidFill>
+                <a:latin typeface="Calibri"/>
+              </a:rPr>
+              <a:t>–  </a:t>
+            </a:r>
+            <a:r>
+              <a:rPr sz="2000" b="0" i="1">
+                <a:solidFill>
+                  <a:srgbClr val="222B22"/>
+                </a:solidFill>
+                <a:latin typeface="Calibri"/>
+              </a:rPr>
+              <a:t>“Surprised.” “Tender.” “Empty.” “Found.” “Confused.” “Quiet.”</a:t>
+            </a:r>
+          </a:p>
+          <a:p>
+            <a:pPr marL="274320" indent="-274320">
+              <a:spcAft>
+                <a:spcPts val="900"/>
+              </a:spcAft>
+            </a:pPr>
+            <a:r>
+              <a:rPr sz="2800" b="1" i="0">
+                <a:solidFill>
+                  <a:srgbClr val="97BC62"/>
+                </a:solidFill>
+                <a:latin typeface="Calibri"/>
+              </a:rPr>
+              <a:t>•  </a:t>
+            </a:r>
+            <a:r>
+              <a:rPr sz="2800" b="0" i="0">
+                <a:solidFill>
+                  <a:srgbClr val="222B22"/>
+                </a:solidFill>
+                <a:latin typeface="Calibri"/>
+              </a:rPr>
+              <a:t>A parent begins; anyone may pass — each word received without commentary</a:t>
+            </a:r>
+          </a:p>
+          <a:p>
+            <a:pPr marL="274320" indent="-274320">
+              <a:spcAft>
+                <a:spcPts val="900"/>
+              </a:spcAft>
+            </a:pPr>
+            <a:r>
+              <a:rPr sz="2800" b="1" i="0">
+                <a:solidFill>
+                  <a:srgbClr val="97BC62"/>
+                </a:solidFill>
+                <a:latin typeface="Calibri"/>
+              </a:rPr>
+              <a:t>•  </a:t>
+            </a:r>
+            <a:r>
+              <a:rPr sz="2800" b="0" i="0">
+                <a:solidFill>
+                  <a:srgbClr val="222B22"/>
+                </a:solidFill>
+                <a:latin typeface="Calibri"/>
+              </a:rPr>
+              <a:t>“Whatever happened tonight is yours. Some of it will keep happening across the week.”</a:t>
+            </a:r>
+          </a:p>
+        </p:txBody>
+      </p:sp>
+      <p:sp>
+        <p:nvSpPr>
+          <p:cNvPr id="90" name="SlideNum"/>
+          <p:cNvSpPr txBox="1"/>
+          <p:nvPr/>
+        </p:nvSpPr>
+        <p:spPr>
+          <a:xfrm>
+            <a:off x="11384280" y="6446520"/>
+            <a:ext cx="640080" cy="292608"/>
+          </a:xfrm>
+          <a:prstGeom prst="rect">
+            <a:avLst/>
+          </a:prstGeom>
+          <a:noFill/>
+        </p:spPr>
+        <p:txBody>
+          <a:bodyPr wrap="none" lIns="0" tIns="0" rIns="45720" bIns="0" anchor="ctr"/>
+          <a:lstStyle/>
+          <a:p>
+            <a:pPr algn="r"/>
+            <a:r>
+              <a:t>121</a:t>
+            </a:r>
+            <a:endParaRPr sz="1000" b="1">
+              <a:solidFill>
+                <a:srgbClr val="7A8A6E"/>
+              </a:solidFill>
+              <a:latin typeface="Calibri"/>
+            </a:endParaRPr>
+          </a:p>
+        </p:txBody>
+      </p:sp>
+    </p:spTree>
+  </p:cSld>
+  <p:clrMapOvr>
+    <a:masterClrMapping/>
+  </p:clrMapOvr>
+</p:sld>
+</file>
+
+<file path=ppt/slides/slide11.xml><?xml version="1.0" encoding="utf-8"?>
+<p:sld xmlns:a="http://schemas.openxmlformats.org/drawingml/2006/main" xmlns:r="http://schemas.openxmlformats.org/officeDocument/2006/relationships" xmlns:p="http://schemas.openxmlformats.org/presentationml/2006/main">
+  <p:cSld>
+    <p:spTree>
+      <p:nvGrpSpPr>
+        <p:cNvPr id="1" name=""/>
+        <p:cNvGrpSpPr/>
+        <p:nvPr/>
+      </p:nvGrpSpPr>
+      <p:grpSpPr>
+        <a:xfrm>
+          <a:off x="0" y="0"/>
+          <a:ext cx="0" cy="0"/>
+          <a:chOff x="0" y="0"/>
+          <a:chExt cx="0" cy="0"/>
+        </a:xfrm>
+      </p:grpSpPr>
+      <p:sp>
+        <p:nvSpPr>
+          <p:cNvPr id="2" name="Rectangle 1"/>
+          <p:cNvSpPr/>
+          <p:nvPr/>
+        </p:nvSpPr>
+        <p:spPr>
+          <a:xfrm>
+            <a:off x="0" y="0"/>
+            <a:ext cx="12191695" cy="6858000"/>
+          </a:xfrm>
+          <a:prstGeom prst="rect">
+            <a:avLst/>
+          </a:prstGeom>
+          <a:solidFill>
+            <a:srgbClr val="FFFFFF"/>
+          </a:solidFill>
+          <a:ln>
+            <a:noFill/>
+          </a:ln>
+        </p:spPr>
+        <p:txBody>
+          <a:bodyPr/>
+          <a:lstStyle/>
+          <a:p>
+            <a:endParaRPr/>
+          </a:p>
+        </p:txBody>
+      </p:sp>
+      <p:sp>
+        <p:nvSpPr>
+          <p:cNvPr id="3" name="TextBox 2"/>
+          <p:cNvSpPr txBox="1"/>
+          <p:nvPr/>
+        </p:nvSpPr>
+        <p:spPr>
+          <a:xfrm>
+            <a:off x="822960" y="502920"/>
+            <a:ext cx="10515600" cy="822960"/>
+          </a:xfrm>
+          <a:prstGeom prst="rect">
+            <a:avLst/>
+          </a:prstGeom>
+          <a:noFill/>
+        </p:spPr>
+        <p:txBody>
+          <a:bodyPr wrap="square">
+            <a:spAutoFit/>
+          </a:bodyPr>
+          <a:lstStyle/>
+          <a:p>
+            <a:pPr algn="l">
+              <a:spcAft>
+                <a:spcPts val="600"/>
+              </a:spcAft>
+            </a:pPr>
+            <a:r>
+              <a:rPr sz="2800" b="1" i="0">
+                <a:solidFill>
+                  <a:srgbClr val="2C5F2D"/>
+                </a:solidFill>
+                <a:latin typeface="Cambria"/>
+              </a:rPr>
               <a:t>Homework — Two Weeks, Four Parts</a:t>
             </a:r>
           </a:p>
@@ -5115,6 +5387,390 @@
 </file>
 
 <file path=ppt/slides/slide12.xml><?xml version="1.0" encoding="utf-8"?>
+<p:sld xmlns:a="http://schemas.openxmlformats.org/drawingml/2006/main" xmlns:p="http://schemas.openxmlformats.org/presentationml/2006/main" xmlns:r="http://schemas.openxmlformats.org/officeDocument/2006/relationships">
+  <p:cSld>
+    <p:spTree>
+      <p:nvGrpSpPr>
+        <p:cNvPr id="1" name=""/>
+        <p:cNvGrpSpPr/>
+        <p:nvPr/>
+      </p:nvGrpSpPr>
+      <p:grpSpPr/>
+      <p:sp>
+        <p:nvSpPr>
+          <p:cNvPr id="2" name="Rectangle 1"/>
+          <p:cNvSpPr/>
+          <p:nvPr/>
+        </p:nvSpPr>
+        <p:spPr>
+          <a:xfrm>
+            <a:off x="0" y="0"/>
+            <a:ext cx="12192000" cy="6858000"/>
+          </a:xfrm>
+          <a:prstGeom prst="rect">
+            <a:avLst/>
+          </a:prstGeom>
+          <a:solidFill>
+            <a:srgbClr val="FFFFFF"/>
+          </a:solidFill>
+          <a:ln>
+            <a:noFill/>
+          </a:ln>
+          <a:effectLst/>
+        </p:spPr>
+        <p:style>
+          <a:lnRef idx="1">
+            <a:schemeClr val="accent1"/>
+          </a:lnRef>
+          <a:fillRef idx="3">
+            <a:schemeClr val="accent1"/>
+          </a:fillRef>
+          <a:effectRef idx="2">
+            <a:schemeClr val="accent1"/>
+          </a:effectRef>
+          <a:fontRef idx="minor">
+            <a:schemeClr val="lt1"/>
+          </a:fontRef>
+        </p:style>
+        <p:txBody>
+          <a:bodyPr rtlCol="0" anchor="ctr"/>
+          <a:lstStyle/>
+          <a:p>
+            <a:pPr algn="ctr"/>
+          </a:p>
+        </p:txBody>
+      </p:sp>
+      <p:sp>
+        <p:nvSpPr>
+          <p:cNvPr id="3" name="TextBox 2"/>
+          <p:cNvSpPr txBox="1"/>
+          <p:nvPr/>
+        </p:nvSpPr>
+        <p:spPr>
+          <a:xfrm>
+            <a:off x="822960" y="502920"/>
+            <a:ext cx="10515600" cy="822960"/>
+          </a:xfrm>
+          <a:prstGeom prst="rect">
+            <a:avLst/>
+          </a:prstGeom>
+          <a:noFill/>
+        </p:spPr>
+        <p:txBody>
+          <a:bodyPr wrap="square">
+            <a:spAutoFit/>
+          </a:bodyPr>
+          <a:lstStyle/>
+          <a:p>
+            <a:r>
+              <a:rPr sz="2800" b="1">
+                <a:solidFill>
+                  <a:srgbClr val="2C5F2D"/>
+                </a:solidFill>
+                <a:latin typeface="Cambria"/>
+              </a:rPr>
+              <a:t>The Take-Home Sheet — the Daily Rhythm</a:t>
+            </a:r>
+          </a:p>
+        </p:txBody>
+      </p:sp>
+      <p:pic>
+        <p:nvPicPr>
+          <p:cNvPr id="4" name="Picture 3" descr="s9_part1.png"/>
+          <p:cNvPicPr>
+            <a:picLocks noChangeAspect="1"/>
+          </p:cNvPicPr>
+          <p:nvPr/>
+        </p:nvPicPr>
+        <p:blipFill>
+          <a:blip r:embed="rId2"/>
+          <a:stretch>
+            <a:fillRect/>
+          </a:stretch>
+        </p:blipFill>
+        <p:spPr>
+          <a:xfrm>
+            <a:off x="1798167" y="1463040"/>
+            <a:ext cx="8595360" cy="4039819"/>
+          </a:xfrm>
+          <a:prstGeom prst="rect">
+            <a:avLst/>
+          </a:prstGeom>
+          <a:ln w="12700">
+            <a:solidFill>
+              <a:srgbClr val="C8C8C8"/>
+            </a:solidFill>
+          </a:ln>
+        </p:spPr>
+      </p:pic>
+      <p:sp>
+        <p:nvSpPr>
+          <p:cNvPr id="5" name="TextBox 4"/>
+          <p:cNvSpPr txBox="1"/>
+          <p:nvPr/>
+        </p:nvSpPr>
+        <p:spPr>
+          <a:xfrm>
+            <a:off x="822960" y="6355080"/>
+            <a:ext cx="10515600" cy="411480"/>
+          </a:xfrm>
+          <a:prstGeom prst="rect">
+            <a:avLst/>
+          </a:prstGeom>
+          <a:noFill/>
+        </p:spPr>
+        <p:txBody>
+          <a:bodyPr wrap="square">
+            <a:spAutoFit/>
+          </a:bodyPr>
+          <a:lstStyle/>
+          <a:p>
+            <a:r>
+              <a:rPr sz="1400" i="1">
+                <a:solidFill>
+                  <a:srgbClr val="595959"/>
+                </a:solidFill>
+                <a:latin typeface="Calibri"/>
+              </a:rPr>
+              <a:t>Handed out now — this is the sheet in your hands.</a:t>
+            </a:r>
+          </a:p>
+        </p:txBody>
+      </p:sp>
+      <p:sp>
+        <p:nvSpPr>
+          <p:cNvPr id="90" name="SlideNum"/>
+          <p:cNvSpPr txBox="1"/>
+          <p:nvPr/>
+        </p:nvSpPr>
+        <p:spPr>
+          <a:xfrm>
+            <a:off x="11384280" y="6446520"/>
+            <a:ext cx="640080" cy="292608"/>
+          </a:xfrm>
+          <a:prstGeom prst="rect">
+            <a:avLst/>
+          </a:prstGeom>
+          <a:noFill/>
+        </p:spPr>
+        <p:txBody>
+          <a:bodyPr wrap="none" lIns="0" tIns="0" rIns="45720" bIns="0" anchor="ctr"/>
+          <a:lstStyle/>
+          <a:p>
+            <a:pPr algn="r"/>
+            <a:r>
+              <a:t>123</a:t>
+            </a:r>
+            <a:endParaRPr sz="1000" b="1">
+              <a:solidFill>
+                <a:srgbClr val="7A8A6E"/>
+              </a:solidFill>
+              <a:latin typeface="Calibri"/>
+            </a:endParaRPr>
+          </a:p>
+        </p:txBody>
+      </p:sp>
+    </p:spTree>
+  </p:cSld>
+  <p:clrMapOvr>
+    <a:masterClrMapping/>
+  </p:clrMapOvr>
+</p:sld>
+</file>
+
+<file path=ppt/slides/slide13.xml><?xml version="1.0" encoding="utf-8"?>
+<p:sld xmlns:a="http://schemas.openxmlformats.org/drawingml/2006/main" xmlns:p="http://schemas.openxmlformats.org/presentationml/2006/main" xmlns:r="http://schemas.openxmlformats.org/officeDocument/2006/relationships">
+  <p:cSld>
+    <p:spTree>
+      <p:nvGrpSpPr>
+        <p:cNvPr id="1" name=""/>
+        <p:cNvGrpSpPr/>
+        <p:nvPr/>
+      </p:nvGrpSpPr>
+      <p:grpSpPr/>
+      <p:sp>
+        <p:nvSpPr>
+          <p:cNvPr id="2" name="Rectangle 1"/>
+          <p:cNvSpPr/>
+          <p:nvPr/>
+        </p:nvSpPr>
+        <p:spPr>
+          <a:xfrm>
+            <a:off x="0" y="0"/>
+            <a:ext cx="12192000" cy="6858000"/>
+          </a:xfrm>
+          <a:prstGeom prst="rect">
+            <a:avLst/>
+          </a:prstGeom>
+          <a:solidFill>
+            <a:srgbClr val="FFFFFF"/>
+          </a:solidFill>
+          <a:ln>
+            <a:noFill/>
+          </a:ln>
+          <a:effectLst/>
+        </p:spPr>
+        <p:style>
+          <a:lnRef idx="1">
+            <a:schemeClr val="accent1"/>
+          </a:lnRef>
+          <a:fillRef idx="3">
+            <a:schemeClr val="accent1"/>
+          </a:fillRef>
+          <a:effectRef idx="2">
+            <a:schemeClr val="accent1"/>
+          </a:effectRef>
+          <a:fontRef idx="minor">
+            <a:schemeClr val="lt1"/>
+          </a:fontRef>
+        </p:style>
+        <p:txBody>
+          <a:bodyPr rtlCol="0" anchor="ctr"/>
+          <a:lstStyle/>
+          <a:p>
+            <a:pPr algn="ctr"/>
+          </a:p>
+        </p:txBody>
+      </p:sp>
+      <p:sp>
+        <p:nvSpPr>
+          <p:cNvPr id="3" name="TextBox 2"/>
+          <p:cNvSpPr txBox="1"/>
+          <p:nvPr/>
+        </p:nvSpPr>
+        <p:spPr>
+          <a:xfrm>
+            <a:off x="822960" y="502920"/>
+            <a:ext cx="10515600" cy="822960"/>
+          </a:xfrm>
+          <a:prstGeom prst="rect">
+            <a:avLst/>
+          </a:prstGeom>
+          <a:noFill/>
+        </p:spPr>
+        <p:txBody>
+          <a:bodyPr wrap="square">
+            <a:spAutoFit/>
+          </a:bodyPr>
+          <a:lstStyle/>
+          <a:p>
+            <a:r>
+              <a:rPr sz="2800" b="1">
+                <a:solidFill>
+                  <a:srgbClr val="2C5F2D"/>
+                </a:solidFill>
+                <a:latin typeface="Cambria"/>
+              </a:rPr>
+              <a:t>The Take-Home Sheet — the Four Parts</a:t>
+            </a:r>
+          </a:p>
+        </p:txBody>
+      </p:sp>
+      <p:pic>
+        <p:nvPicPr>
+          <p:cNvPr id="4" name="Picture 3" descr="s9_part2.png"/>
+          <p:cNvPicPr>
+            <a:picLocks noChangeAspect="1"/>
+          </p:cNvPicPr>
+          <p:nvPr/>
+        </p:nvPicPr>
+        <p:blipFill>
+          <a:blip r:embed="rId2"/>
+          <a:stretch>
+            <a:fillRect/>
+          </a:stretch>
+        </p:blipFill>
+        <p:spPr>
+          <a:xfrm>
+            <a:off x="2066004" y="1463040"/>
+            <a:ext cx="8059687" cy="4709160"/>
+          </a:xfrm>
+          <a:prstGeom prst="rect">
+            <a:avLst/>
+          </a:prstGeom>
+          <a:ln w="12700">
+            <a:solidFill>
+              <a:srgbClr val="C8C8C8"/>
+            </a:solidFill>
+          </a:ln>
+        </p:spPr>
+      </p:pic>
+      <p:sp>
+        <p:nvSpPr>
+          <p:cNvPr id="5" name="TextBox 4"/>
+          <p:cNvSpPr txBox="1"/>
+          <p:nvPr/>
+        </p:nvSpPr>
+        <p:spPr>
+          <a:xfrm>
+            <a:off x="822960" y="6355080"/>
+            <a:ext cx="10515600" cy="411480"/>
+          </a:xfrm>
+          <a:prstGeom prst="rect">
+            <a:avLst/>
+          </a:prstGeom>
+          <a:noFill/>
+        </p:spPr>
+        <p:txBody>
+          <a:bodyPr wrap="square">
+            <a:spAutoFit/>
+          </a:bodyPr>
+          <a:lstStyle/>
+          <a:p>
+            <a:r>
+              <a:rPr sz="1400" i="1">
+                <a:solidFill>
+                  <a:srgbClr val="595959"/>
+                </a:solidFill>
+                <a:latin typeface="Calibri"/>
+              </a:rPr>
+              <a:t>One practice at a time — and a partner expecting you at the end of week one.</a:t>
+            </a:r>
+          </a:p>
+        </p:txBody>
+      </p:sp>
+      <p:sp>
+        <p:nvSpPr>
+          <p:cNvPr id="90" name="SlideNum"/>
+          <p:cNvSpPr txBox="1"/>
+          <p:nvPr/>
+        </p:nvSpPr>
+        <p:spPr>
+          <a:xfrm>
+            <a:off x="11384280" y="6446520"/>
+            <a:ext cx="640080" cy="292608"/>
+          </a:xfrm>
+          <a:prstGeom prst="rect">
+            <a:avLst/>
+          </a:prstGeom>
+          <a:noFill/>
+        </p:spPr>
+        <p:txBody>
+          <a:bodyPr wrap="none" lIns="0" tIns="0" rIns="45720" bIns="0" anchor="ctr"/>
+          <a:lstStyle/>
+          <a:p>
+            <a:pPr algn="r"/>
+            <a:r>
+              <a:t>123a</a:t>
+            </a:r>
+            <a:endParaRPr sz="1000" b="1">
+              <a:solidFill>
+                <a:srgbClr val="7A8A6E"/>
+              </a:solidFill>
+              <a:latin typeface="Calibri"/>
+            </a:endParaRPr>
+          </a:p>
+        </p:txBody>
+      </p:sp>
+    </p:spTree>
+  </p:cSld>
+  <p:clrMapOvr>
+    <a:masterClrMapping/>
+  </p:clrMapOvr>
+</p:sld>
+</file>
+
+<file path=ppt/slides/slide14.xml><?xml version="1.0" encoding="utf-8"?>
 <p:sld xmlns:a="http://schemas.openxmlformats.org/drawingml/2006/main" xmlns:r="http://schemas.openxmlformats.org/officeDocument/2006/relationships" xmlns:p="http://schemas.openxmlformats.org/presentationml/2006/main">
   <p:cSld>
     <p:spTree>
@@ -5447,7 +6103,7 @@
 </p:sld>
 </file>
 
-<file path=ppt/slides/slide13.xml><?xml version="1.0" encoding="utf-8"?>
+<file path=ppt/slides/slide15.xml><?xml version="1.0" encoding="utf-8"?>
 <p:sld xmlns:a="http://schemas.openxmlformats.org/drawingml/2006/main" xmlns:r="http://schemas.openxmlformats.org/officeDocument/2006/relationships" xmlns:p="http://schemas.openxmlformats.org/presentationml/2006/main">
   <p:cSld>
     <p:spTree>
@@ -5838,595 +6494,6 @@
             <a:pPr algn="r"/>
             <a:r>
               <a:t>125</a:t>
-            </a:r>
-            <a:endParaRPr sz="1000" b="1">
-              <a:solidFill>
-                <a:srgbClr val="7A8A6E"/>
-              </a:solidFill>
-              <a:latin typeface="Calibri"/>
-            </a:endParaRPr>
-          </a:p>
-        </p:txBody>
-      </p:sp>
-    </p:spTree>
-  </p:cSld>
-  <p:clrMapOvr>
-    <a:masterClrMapping/>
-  </p:clrMapOvr>
-</p:sld>
-</file>
-
-<file path=ppt/slides/slide14.xml><?xml version="1.0" encoding="utf-8"?>
-<p:sld xmlns:a="http://schemas.openxmlformats.org/drawingml/2006/main" xmlns:p="http://schemas.openxmlformats.org/presentationml/2006/main" xmlns:r="http://schemas.openxmlformats.org/officeDocument/2006/relationships">
-  <p:cSld>
-    <p:spTree>
-      <p:nvGrpSpPr>
-        <p:cNvPr id="1" name=""/>
-        <p:cNvGrpSpPr/>
-        <p:nvPr/>
-      </p:nvGrpSpPr>
-      <p:grpSpPr/>
-      <p:sp>
-        <p:nvSpPr>
-          <p:cNvPr id="2" name="Rectangle 1"/>
-          <p:cNvSpPr/>
-          <p:nvPr/>
-        </p:nvSpPr>
-        <p:spPr>
-          <a:xfrm>
-            <a:off x="0" y="0"/>
-            <a:ext cx="12192000" cy="6858000"/>
-          </a:xfrm>
-          <a:prstGeom prst="rect">
-            <a:avLst/>
-          </a:prstGeom>
-          <a:solidFill>
-            <a:srgbClr val="FFFFFF"/>
-          </a:solidFill>
-          <a:ln>
-            <a:noFill/>
-          </a:ln>
-          <a:effectLst/>
-        </p:spPr>
-        <p:style>
-          <a:lnRef idx="1">
-            <a:schemeClr val="accent1"/>
-          </a:lnRef>
-          <a:fillRef idx="3">
-            <a:schemeClr val="accent1"/>
-          </a:fillRef>
-          <a:effectRef idx="2">
-            <a:schemeClr val="accent1"/>
-          </a:effectRef>
-          <a:fontRef idx="minor">
-            <a:schemeClr val="lt1"/>
-          </a:fontRef>
-        </p:style>
-        <p:txBody>
-          <a:bodyPr rtlCol="0" anchor="ctr"/>
-          <a:lstStyle/>
-          <a:p>
-            <a:pPr algn="ctr"/>
-          </a:p>
-        </p:txBody>
-      </p:sp>
-      <p:sp>
-        <p:nvSpPr>
-          <p:cNvPr id="3" name="TextBox 2"/>
-          <p:cNvSpPr txBox="1"/>
-          <p:nvPr/>
-        </p:nvSpPr>
-        <p:spPr>
-          <a:xfrm>
-            <a:off x="822960" y="502920"/>
-            <a:ext cx="10515600" cy="822960"/>
-          </a:xfrm>
-          <a:prstGeom prst="rect">
-            <a:avLst/>
-          </a:prstGeom>
-          <a:noFill/>
-        </p:spPr>
-        <p:txBody>
-          <a:bodyPr wrap="square">
-            <a:spAutoFit/>
-          </a:bodyPr>
-          <a:lstStyle/>
-          <a:p>
-            <a:r>
-              <a:rPr sz="2800" b="1">
-                <a:solidFill>
-                  <a:srgbClr val="2C5F2D"/>
-                </a:solidFill>
-                <a:latin typeface="Cambria"/>
-              </a:rPr>
-              <a:t>Where We Are — the Four Connects</a:t>
-            </a:r>
-          </a:p>
-        </p:txBody>
-      </p:sp>
-      <p:pic>
-        <p:nvPicPr>
-          <p:cNvPr id="4" name="Picture 3" descr="four-connects.png"/>
-          <p:cNvPicPr>
-            <a:picLocks noChangeAspect="1"/>
-          </p:cNvPicPr>
-          <p:nvPr/>
-        </p:nvPicPr>
-        <p:blipFill>
-          <a:blip r:embed="rId2"/>
-          <a:stretch>
-            <a:fillRect/>
-          </a:stretch>
-        </p:blipFill>
-        <p:spPr>
-          <a:xfrm>
-            <a:off x="932688" y="1645920"/>
-            <a:ext cx="10332720" cy="3708663"/>
-          </a:xfrm>
-          <a:prstGeom prst="rect">
-            <a:avLst/>
-          </a:prstGeom>
-        </p:spPr>
-      </p:pic>
-      <p:sp>
-        <p:nvSpPr>
-          <p:cNvPr id="5" name="TextBox 4"/>
-          <p:cNvSpPr txBox="1"/>
-          <p:nvPr/>
-        </p:nvSpPr>
-        <p:spPr>
-          <a:xfrm>
-            <a:off x="822960" y="5623560"/>
-            <a:ext cx="10515600" cy="914400"/>
-          </a:xfrm>
-          <a:prstGeom prst="rect">
-            <a:avLst/>
-          </a:prstGeom>
-          <a:noFill/>
-        </p:spPr>
-        <p:txBody>
-          <a:bodyPr wrap="square">
-            <a:spAutoFit/>
-          </a:bodyPr>
-          <a:lstStyle/>
-          <a:p>
-            <a:r>
-              <a:rPr sz="1800" b="0">
-                <a:solidFill>
-                  <a:srgbClr val="222B22"/>
-                </a:solidFill>
-                <a:latin typeface="Calibri"/>
-              </a:rPr>
-              <a:t>Session 9 stands in the third box — </a:t>
-            </a:r>
-            <a:r>
-              <a:rPr sz="1800" b="1">
-                <a:solidFill>
-                  <a:srgbClr val="2C5F2D"/>
-                </a:solidFill>
-                <a:latin typeface="Calibri"/>
-              </a:rPr>
-              <a:t>Connect with God</a:t>
-            </a:r>
-            <a:r>
-              <a:rPr sz="1800" b="0">
-                <a:solidFill>
-                  <a:srgbClr val="222B22"/>
-                </a:solidFill>
-                <a:latin typeface="Calibri"/>
-              </a:rPr>
-              <a:t>. Each connection makes the next one real (Matt. 22:37–40).</a:t>
-            </a:r>
-          </a:p>
-        </p:txBody>
-      </p:sp>
-      <p:sp>
-        <p:nvSpPr>
-          <p:cNvPr id="90" name="SlideNum"/>
-          <p:cNvSpPr txBox="1"/>
-          <p:nvPr/>
-        </p:nvSpPr>
-        <p:spPr>
-          <a:xfrm>
-            <a:off x="11384280" y="6446520"/>
-            <a:ext cx="640080" cy="292608"/>
-          </a:xfrm>
-          <a:prstGeom prst="rect">
-            <a:avLst/>
-          </a:prstGeom>
-          <a:noFill/>
-        </p:spPr>
-        <p:txBody>
-          <a:bodyPr wrap="none" lIns="0" tIns="0" rIns="45720" bIns="0" anchor="ctr"/>
-          <a:lstStyle/>
-          <a:p>
-            <a:pPr algn="r"/>
-            <a:r>
-              <a:t>114a</a:t>
-            </a:r>
-            <a:endParaRPr sz="1000" b="1">
-              <a:solidFill>
-                <a:srgbClr val="7A8A6E"/>
-              </a:solidFill>
-              <a:latin typeface="Calibri"/>
-            </a:endParaRPr>
-          </a:p>
-        </p:txBody>
-      </p:sp>
-    </p:spTree>
-  </p:cSld>
-  <p:clrMapOvr>
-    <a:masterClrMapping/>
-  </p:clrMapOvr>
-</p:sld>
-</file>
-
-<file path=ppt/slides/slide15.xml><?xml version="1.0" encoding="utf-8"?>
-<p:sld xmlns:a="http://schemas.openxmlformats.org/drawingml/2006/main" xmlns:p="http://schemas.openxmlformats.org/presentationml/2006/main" xmlns:r="http://schemas.openxmlformats.org/officeDocument/2006/relationships">
-  <p:cSld>
-    <p:spTree>
-      <p:nvGrpSpPr>
-        <p:cNvPr id="1" name=""/>
-        <p:cNvGrpSpPr/>
-        <p:nvPr/>
-      </p:nvGrpSpPr>
-      <p:grpSpPr/>
-      <p:sp>
-        <p:nvSpPr>
-          <p:cNvPr id="2" name="Rectangle 1"/>
-          <p:cNvSpPr/>
-          <p:nvPr/>
-        </p:nvSpPr>
-        <p:spPr>
-          <a:xfrm>
-            <a:off x="0" y="0"/>
-            <a:ext cx="12192000" cy="6858000"/>
-          </a:xfrm>
-          <a:prstGeom prst="rect">
-            <a:avLst/>
-          </a:prstGeom>
-          <a:solidFill>
-            <a:srgbClr val="FFFFFF"/>
-          </a:solidFill>
-          <a:ln>
-            <a:noFill/>
-          </a:ln>
-          <a:effectLst/>
-        </p:spPr>
-        <p:style>
-          <a:lnRef idx="1">
-            <a:schemeClr val="accent1"/>
-          </a:lnRef>
-          <a:fillRef idx="3">
-            <a:schemeClr val="accent1"/>
-          </a:fillRef>
-          <a:effectRef idx="2">
-            <a:schemeClr val="accent1"/>
-          </a:effectRef>
-          <a:fontRef idx="minor">
-            <a:schemeClr val="lt1"/>
-          </a:fontRef>
-        </p:style>
-        <p:txBody>
-          <a:bodyPr rtlCol="0" anchor="ctr"/>
-          <a:lstStyle/>
-          <a:p>
-            <a:pPr algn="ctr"/>
-          </a:p>
-        </p:txBody>
-      </p:sp>
-      <p:sp>
-        <p:nvSpPr>
-          <p:cNvPr id="3" name="TextBox 2"/>
-          <p:cNvSpPr txBox="1"/>
-          <p:nvPr/>
-        </p:nvSpPr>
-        <p:spPr>
-          <a:xfrm>
-            <a:off x="822960" y="502920"/>
-            <a:ext cx="10515600" cy="822960"/>
-          </a:xfrm>
-          <a:prstGeom prst="rect">
-            <a:avLst/>
-          </a:prstGeom>
-          <a:noFill/>
-        </p:spPr>
-        <p:txBody>
-          <a:bodyPr wrap="square">
-            <a:spAutoFit/>
-          </a:bodyPr>
-          <a:lstStyle/>
-          <a:p>
-            <a:r>
-              <a:rPr sz="2800" b="1">
-                <a:solidFill>
-                  <a:srgbClr val="2C5F2D"/>
-                </a:solidFill>
-                <a:latin typeface="Cambria"/>
-              </a:rPr>
-              <a:t>The Take-Home Sheet — the Daily Rhythm</a:t>
-            </a:r>
-          </a:p>
-        </p:txBody>
-      </p:sp>
-      <p:pic>
-        <p:nvPicPr>
-          <p:cNvPr id="4" name="Picture 3" descr="s9_part1.png"/>
-          <p:cNvPicPr>
-            <a:picLocks noChangeAspect="1"/>
-          </p:cNvPicPr>
-          <p:nvPr/>
-        </p:nvPicPr>
-        <p:blipFill>
-          <a:blip r:embed="rId2"/>
-          <a:stretch>
-            <a:fillRect/>
-          </a:stretch>
-        </p:blipFill>
-        <p:spPr>
-          <a:xfrm>
-            <a:off x="1798167" y="1463040"/>
-            <a:ext cx="8595360" cy="4039819"/>
-          </a:xfrm>
-          <a:prstGeom prst="rect">
-            <a:avLst/>
-          </a:prstGeom>
-          <a:ln w="12700">
-            <a:solidFill>
-              <a:srgbClr val="C8C8C8"/>
-            </a:solidFill>
-          </a:ln>
-        </p:spPr>
-      </p:pic>
-      <p:sp>
-        <p:nvSpPr>
-          <p:cNvPr id="5" name="TextBox 4"/>
-          <p:cNvSpPr txBox="1"/>
-          <p:nvPr/>
-        </p:nvSpPr>
-        <p:spPr>
-          <a:xfrm>
-            <a:off x="822960" y="6355080"/>
-            <a:ext cx="10515600" cy="411480"/>
-          </a:xfrm>
-          <a:prstGeom prst="rect">
-            <a:avLst/>
-          </a:prstGeom>
-          <a:noFill/>
-        </p:spPr>
-        <p:txBody>
-          <a:bodyPr wrap="square">
-            <a:spAutoFit/>
-          </a:bodyPr>
-          <a:lstStyle/>
-          <a:p>
-            <a:r>
-              <a:rPr sz="1400" i="1">
-                <a:solidFill>
-                  <a:srgbClr val="595959"/>
-                </a:solidFill>
-                <a:latin typeface="Calibri"/>
-              </a:rPr>
-              <a:t>Handed out now — this is the sheet in your hands.</a:t>
-            </a:r>
-          </a:p>
-        </p:txBody>
-      </p:sp>
-      <p:sp>
-        <p:nvSpPr>
-          <p:cNvPr id="90" name="SlideNum"/>
-          <p:cNvSpPr txBox="1"/>
-          <p:nvPr/>
-        </p:nvSpPr>
-        <p:spPr>
-          <a:xfrm>
-            <a:off x="11384280" y="6446520"/>
-            <a:ext cx="640080" cy="292608"/>
-          </a:xfrm>
-          <a:prstGeom prst="rect">
-            <a:avLst/>
-          </a:prstGeom>
-          <a:noFill/>
-        </p:spPr>
-        <p:txBody>
-          <a:bodyPr wrap="none" lIns="0" tIns="0" rIns="45720" bIns="0" anchor="ctr"/>
-          <a:lstStyle/>
-          <a:p>
-            <a:pPr algn="r"/>
-            <a:r>
-              <a:t>123</a:t>
-            </a:r>
-            <a:endParaRPr sz="1000" b="1">
-              <a:solidFill>
-                <a:srgbClr val="7A8A6E"/>
-              </a:solidFill>
-              <a:latin typeface="Calibri"/>
-            </a:endParaRPr>
-          </a:p>
-        </p:txBody>
-      </p:sp>
-    </p:spTree>
-  </p:cSld>
-  <p:clrMapOvr>
-    <a:masterClrMapping/>
-  </p:clrMapOvr>
-</p:sld>
-</file>
-
-<file path=ppt/slides/slide16.xml><?xml version="1.0" encoding="utf-8"?>
-<p:sld xmlns:a="http://schemas.openxmlformats.org/drawingml/2006/main" xmlns:p="http://schemas.openxmlformats.org/presentationml/2006/main" xmlns:r="http://schemas.openxmlformats.org/officeDocument/2006/relationships">
-  <p:cSld>
-    <p:spTree>
-      <p:nvGrpSpPr>
-        <p:cNvPr id="1" name=""/>
-        <p:cNvGrpSpPr/>
-        <p:nvPr/>
-      </p:nvGrpSpPr>
-      <p:grpSpPr/>
-      <p:sp>
-        <p:nvSpPr>
-          <p:cNvPr id="2" name="Rectangle 1"/>
-          <p:cNvSpPr/>
-          <p:nvPr/>
-        </p:nvSpPr>
-        <p:spPr>
-          <a:xfrm>
-            <a:off x="0" y="0"/>
-            <a:ext cx="12192000" cy="6858000"/>
-          </a:xfrm>
-          <a:prstGeom prst="rect">
-            <a:avLst/>
-          </a:prstGeom>
-          <a:solidFill>
-            <a:srgbClr val="FFFFFF"/>
-          </a:solidFill>
-          <a:ln>
-            <a:noFill/>
-          </a:ln>
-          <a:effectLst/>
-        </p:spPr>
-        <p:style>
-          <a:lnRef idx="1">
-            <a:schemeClr val="accent1"/>
-          </a:lnRef>
-          <a:fillRef idx="3">
-            <a:schemeClr val="accent1"/>
-          </a:fillRef>
-          <a:effectRef idx="2">
-            <a:schemeClr val="accent1"/>
-          </a:effectRef>
-          <a:fontRef idx="minor">
-            <a:schemeClr val="lt1"/>
-          </a:fontRef>
-        </p:style>
-        <p:txBody>
-          <a:bodyPr rtlCol="0" anchor="ctr"/>
-          <a:lstStyle/>
-          <a:p>
-            <a:pPr algn="ctr"/>
-          </a:p>
-        </p:txBody>
-      </p:sp>
-      <p:sp>
-        <p:nvSpPr>
-          <p:cNvPr id="3" name="TextBox 2"/>
-          <p:cNvSpPr txBox="1"/>
-          <p:nvPr/>
-        </p:nvSpPr>
-        <p:spPr>
-          <a:xfrm>
-            <a:off x="822960" y="502920"/>
-            <a:ext cx="10515600" cy="822960"/>
-          </a:xfrm>
-          <a:prstGeom prst="rect">
-            <a:avLst/>
-          </a:prstGeom>
-          <a:noFill/>
-        </p:spPr>
-        <p:txBody>
-          <a:bodyPr wrap="square">
-            <a:spAutoFit/>
-          </a:bodyPr>
-          <a:lstStyle/>
-          <a:p>
-            <a:r>
-              <a:rPr sz="2800" b="1">
-                <a:solidFill>
-                  <a:srgbClr val="2C5F2D"/>
-                </a:solidFill>
-                <a:latin typeface="Cambria"/>
-              </a:rPr>
-              <a:t>The Take-Home Sheet — the Four Parts</a:t>
-            </a:r>
-          </a:p>
-        </p:txBody>
-      </p:sp>
-      <p:pic>
-        <p:nvPicPr>
-          <p:cNvPr id="4" name="Picture 3" descr="s9_part2.png"/>
-          <p:cNvPicPr>
-            <a:picLocks noChangeAspect="1"/>
-          </p:cNvPicPr>
-          <p:nvPr/>
-        </p:nvPicPr>
-        <p:blipFill>
-          <a:blip r:embed="rId2"/>
-          <a:stretch>
-            <a:fillRect/>
-          </a:stretch>
-        </p:blipFill>
-        <p:spPr>
-          <a:xfrm>
-            <a:off x="2066004" y="1463040"/>
-            <a:ext cx="8059687" cy="4709160"/>
-          </a:xfrm>
-          <a:prstGeom prst="rect">
-            <a:avLst/>
-          </a:prstGeom>
-          <a:ln w="12700">
-            <a:solidFill>
-              <a:srgbClr val="C8C8C8"/>
-            </a:solidFill>
-          </a:ln>
-        </p:spPr>
-      </p:pic>
-      <p:sp>
-        <p:nvSpPr>
-          <p:cNvPr id="5" name="TextBox 4"/>
-          <p:cNvSpPr txBox="1"/>
-          <p:nvPr/>
-        </p:nvSpPr>
-        <p:spPr>
-          <a:xfrm>
-            <a:off x="822960" y="6355080"/>
-            <a:ext cx="10515600" cy="411480"/>
-          </a:xfrm>
-          <a:prstGeom prst="rect">
-            <a:avLst/>
-          </a:prstGeom>
-          <a:noFill/>
-        </p:spPr>
-        <p:txBody>
-          <a:bodyPr wrap="square">
-            <a:spAutoFit/>
-          </a:bodyPr>
-          <a:lstStyle/>
-          <a:p>
-            <a:r>
-              <a:rPr sz="1400" i="1">
-                <a:solidFill>
-                  <a:srgbClr val="595959"/>
-                </a:solidFill>
-                <a:latin typeface="Calibri"/>
-              </a:rPr>
-              <a:t>One practice at a time — and a partner expecting you at the end of week one.</a:t>
-            </a:r>
-          </a:p>
-        </p:txBody>
-      </p:sp>
-      <p:sp>
-        <p:nvSpPr>
-          <p:cNvPr id="90" name="SlideNum"/>
-          <p:cNvSpPr txBox="1"/>
-          <p:nvPr/>
-        </p:nvSpPr>
-        <p:spPr>
-          <a:xfrm>
-            <a:off x="11384280" y="6446520"/>
-            <a:ext cx="640080" cy="292608"/>
-          </a:xfrm>
-          <a:prstGeom prst="rect">
-            <a:avLst/>
-          </a:prstGeom>
-          <a:noFill/>
-        </p:spPr>
-        <p:txBody>
-          <a:bodyPr wrap="none" lIns="0" tIns="0" rIns="45720" bIns="0" anchor="ctr"/>
-          <a:lstStyle/>
-          <a:p>
-            <a:pPr algn="r"/>
-            <a:r>
-              <a:t>123a</a:t>
             </a:r>
             <a:endParaRPr sz="1000" b="1">
               <a:solidFill>
@@ -6695,6 +6762,211 @@
 </file>
 
 <file path=ppt/slides/slide3.xml><?xml version="1.0" encoding="utf-8"?>
+<p:sld xmlns:a="http://schemas.openxmlformats.org/drawingml/2006/main" xmlns:p="http://schemas.openxmlformats.org/presentationml/2006/main" xmlns:r="http://schemas.openxmlformats.org/officeDocument/2006/relationships">
+  <p:cSld>
+    <p:spTree>
+      <p:nvGrpSpPr>
+        <p:cNvPr id="1" name=""/>
+        <p:cNvGrpSpPr/>
+        <p:nvPr/>
+      </p:nvGrpSpPr>
+      <p:grpSpPr/>
+      <p:sp>
+        <p:nvSpPr>
+          <p:cNvPr id="2" name="Rectangle 1"/>
+          <p:cNvSpPr/>
+          <p:nvPr/>
+        </p:nvSpPr>
+        <p:spPr>
+          <a:xfrm>
+            <a:off x="0" y="0"/>
+            <a:ext cx="12192000" cy="6858000"/>
+          </a:xfrm>
+          <a:prstGeom prst="rect">
+            <a:avLst/>
+          </a:prstGeom>
+          <a:solidFill>
+            <a:srgbClr val="FFFFFF"/>
+          </a:solidFill>
+          <a:ln>
+            <a:noFill/>
+          </a:ln>
+          <a:effectLst/>
+        </p:spPr>
+        <p:style>
+          <a:lnRef idx="1">
+            <a:schemeClr val="accent1"/>
+          </a:lnRef>
+          <a:fillRef idx="3">
+            <a:schemeClr val="accent1"/>
+          </a:fillRef>
+          <a:effectRef idx="2">
+            <a:schemeClr val="accent1"/>
+          </a:effectRef>
+          <a:fontRef idx="minor">
+            <a:schemeClr val="lt1"/>
+          </a:fontRef>
+        </p:style>
+        <p:txBody>
+          <a:bodyPr rtlCol="0" anchor="ctr"/>
+          <a:lstStyle/>
+          <a:p>
+            <a:pPr algn="ctr"/>
+          </a:p>
+        </p:txBody>
+      </p:sp>
+      <p:sp>
+        <p:nvSpPr>
+          <p:cNvPr id="3" name="TextBox 2"/>
+          <p:cNvSpPr txBox="1"/>
+          <p:nvPr/>
+        </p:nvSpPr>
+        <p:spPr>
+          <a:xfrm>
+            <a:off x="822960" y="502920"/>
+            <a:ext cx="10515600" cy="822960"/>
+          </a:xfrm>
+          <a:prstGeom prst="rect">
+            <a:avLst/>
+          </a:prstGeom>
+          <a:noFill/>
+        </p:spPr>
+        <p:txBody>
+          <a:bodyPr wrap="square">
+            <a:spAutoFit/>
+          </a:bodyPr>
+          <a:lstStyle/>
+          <a:p>
+            <a:r>
+              <a:rPr sz="2800" b="1">
+                <a:solidFill>
+                  <a:srgbClr val="2C5F2D"/>
+                </a:solidFill>
+                <a:latin typeface="Cambria"/>
+              </a:rPr>
+              <a:t>Where We Are — the Four Connects</a:t>
+            </a:r>
+          </a:p>
+        </p:txBody>
+      </p:sp>
+      <p:sp>
+        <p:nvSpPr>
+          <p:cNvPr id="5" name="TextBox 4"/>
+          <p:cNvSpPr txBox="1"/>
+          <p:nvPr/>
+        </p:nvSpPr>
+        <p:spPr>
+          <a:xfrm>
+            <a:off x="822960" y="5623560"/>
+            <a:ext cx="10515600" cy="914400"/>
+          </a:xfrm>
+          <a:prstGeom prst="rect">
+            <a:avLst/>
+          </a:prstGeom>
+          <a:noFill/>
+        </p:spPr>
+        <p:txBody>
+          <a:bodyPr wrap="square">
+            <a:spAutoFit/>
+          </a:bodyPr>
+          <a:lstStyle/>
+          <a:p>
+            <a:r>
+              <a:rPr sz="1800" b="0">
+                <a:solidFill>
+                  <a:srgbClr val="222B22"/>
+                </a:solidFill>
+                <a:latin typeface="Calibri"/>
+              </a:rPr>
+              <a:t>Session 9 stands in the third box — </a:t>
+            </a:r>
+            <a:r>
+              <a:rPr sz="1800" b="1">
+                <a:solidFill>
+                  <a:srgbClr val="2C5F2D"/>
+                </a:solidFill>
+                <a:latin typeface="Calibri"/>
+              </a:rPr>
+              <a:t>Connect with God</a:t>
+            </a:r>
+            <a:r>
+              <a:rPr sz="1800" b="0">
+                <a:solidFill>
+                  <a:srgbClr val="222B22"/>
+                </a:solidFill>
+                <a:latin typeface="Calibri"/>
+              </a:rPr>
+              <a:t>. Each connection makes the next one real (Matt. 22:37–40).</a:t>
+            </a:r>
+          </a:p>
+        </p:txBody>
+      </p:sp>
+      <p:sp>
+        <p:nvSpPr>
+          <p:cNvPr id="90" name="SlideNum"/>
+          <p:cNvSpPr txBox="1"/>
+          <p:nvPr/>
+        </p:nvSpPr>
+        <p:spPr>
+          <a:xfrm>
+            <a:off x="11384280" y="6446520"/>
+            <a:ext cx="640080" cy="292608"/>
+          </a:xfrm>
+          <a:prstGeom prst="rect">
+            <a:avLst/>
+          </a:prstGeom>
+          <a:noFill/>
+        </p:spPr>
+        <p:txBody>
+          <a:bodyPr wrap="none" lIns="0" tIns="0" rIns="45720" bIns="0" anchor="ctr"/>
+          <a:lstStyle/>
+          <a:p>
+            <a:pPr algn="r"/>
+            <a:r>
+              <a:t>114a</a:t>
+            </a:r>
+            <a:endParaRPr sz="1000" b="1">
+              <a:solidFill>
+                <a:srgbClr val="7A8A6E"/>
+              </a:solidFill>
+              <a:latin typeface="Calibri"/>
+            </a:endParaRPr>
+          </a:p>
+        </p:txBody>
+      </p:sp>
+      <p:pic>
+        <p:nvPicPr>
+          <p:cNvPr id="91" name="Picture 90" descr="four-connects.png"/>
+          <p:cNvPicPr>
+            <a:picLocks noChangeAspect="1"/>
+          </p:cNvPicPr>
+          <p:nvPr/>
+        </p:nvPicPr>
+        <p:blipFill>
+          <a:blip r:embed="rId4"/>
+          <a:stretch>
+            <a:fillRect/>
+          </a:stretch>
+        </p:blipFill>
+        <p:spPr>
+          <a:xfrm>
+            <a:off x="932688" y="1645920"/>
+            <a:ext cx="10332720" cy="3708663"/>
+          </a:xfrm>
+          <a:prstGeom prst="rect">
+            <a:avLst/>
+          </a:prstGeom>
+        </p:spPr>
+      </p:pic>
+    </p:spTree>
+  </p:cSld>
+  <p:clrMapOvr>
+    <a:masterClrMapping/>
+  </p:clrMapOvr>
+</p:sld>
+</file>
+
+<file path=ppt/slides/slide4.xml><?xml version="1.0" encoding="utf-8"?>
 <p:sld xmlns:a="http://schemas.openxmlformats.org/drawingml/2006/main" xmlns:r="http://schemas.openxmlformats.org/officeDocument/2006/relationships" xmlns:p="http://schemas.openxmlformats.org/presentationml/2006/main">
   <p:cSld>
     <p:spTree>
@@ -7120,7 +7392,7 @@
 </p:sld>
 </file>
 
-<file path=ppt/slides/slide4.xml><?xml version="1.0" encoding="utf-8"?>
+<file path=ppt/slides/slide5.xml><?xml version="1.0" encoding="utf-8"?>
 <p:sld xmlns:a="http://schemas.openxmlformats.org/drawingml/2006/main" xmlns:r="http://schemas.openxmlformats.org/officeDocument/2006/relationships" xmlns:p="http://schemas.openxmlformats.org/presentationml/2006/main">
   <p:cSld>
     <p:spTree>
@@ -7467,7 +7739,7 @@
 </p:sld>
 </file>
 
-<file path=ppt/slides/slide5.xml><?xml version="1.0" encoding="utf-8"?>
+<file path=ppt/slides/slide6.xml><?xml version="1.0" encoding="utf-8"?>
 <p:sld xmlns:a="http://schemas.openxmlformats.org/drawingml/2006/main" xmlns:r="http://schemas.openxmlformats.org/officeDocument/2006/relationships" xmlns:p="http://schemas.openxmlformats.org/presentationml/2006/main">
   <p:cSld>
     <p:spTree>
@@ -7750,7 +8022,7 @@
 </p:sld>
 </file>
 
-<file path=ppt/slides/slide6.xml><?xml version="1.0" encoding="utf-8"?>
+<file path=ppt/slides/slide7.xml><?xml version="1.0" encoding="utf-8"?>
 <p:sld xmlns:a="http://schemas.openxmlformats.org/drawingml/2006/main" xmlns:r="http://schemas.openxmlformats.org/officeDocument/2006/relationships" xmlns:p="http://schemas.openxmlformats.org/presentationml/2006/main">
   <p:cSld>
     <p:spTree>
@@ -8138,278 +8410,6 @@
 </p:sld>
 </file>
 
-<file path=ppt/slides/slide7.xml><?xml version="1.0" encoding="utf-8"?>
-<p:sld xmlns:a="http://schemas.openxmlformats.org/drawingml/2006/main" xmlns:r="http://schemas.openxmlformats.org/officeDocument/2006/relationships" xmlns:p="http://schemas.openxmlformats.org/presentationml/2006/main">
-  <p:cSld>
-    <p:spTree>
-      <p:nvGrpSpPr>
-        <p:cNvPr id="1" name=""/>
-        <p:cNvGrpSpPr/>
-        <p:nvPr/>
-      </p:nvGrpSpPr>
-      <p:grpSpPr>
-        <a:xfrm>
-          <a:off x="0" y="0"/>
-          <a:ext cx="0" cy="0"/>
-          <a:chOff x="0" y="0"/>
-          <a:chExt cx="0" cy="0"/>
-        </a:xfrm>
-      </p:grpSpPr>
-      <p:sp>
-        <p:nvSpPr>
-          <p:cNvPr id="2" name="Rectangle 1"/>
-          <p:cNvSpPr/>
-          <p:nvPr/>
-        </p:nvSpPr>
-        <p:spPr>
-          <a:xfrm>
-            <a:off x="0" y="0"/>
-            <a:ext cx="12191695" cy="6858000"/>
-          </a:xfrm>
-          <a:prstGeom prst="rect">
-            <a:avLst/>
-          </a:prstGeom>
-          <a:solidFill>
-            <a:srgbClr val="FFFFFF"/>
-          </a:solidFill>
-          <a:ln>
-            <a:noFill/>
-          </a:ln>
-        </p:spPr>
-        <p:txBody>
-          <a:bodyPr/>
-          <a:lstStyle/>
-          <a:p>
-            <a:endParaRPr/>
-          </a:p>
-        </p:txBody>
-      </p:sp>
-      <p:sp>
-        <p:nvSpPr>
-          <p:cNvPr id="3" name="TextBox 2"/>
-          <p:cNvSpPr txBox="1"/>
-          <p:nvPr/>
-        </p:nvSpPr>
-        <p:spPr>
-          <a:xfrm>
-            <a:off x="822960" y="502920"/>
-            <a:ext cx="10515600" cy="822960"/>
-          </a:xfrm>
-          <a:prstGeom prst="rect">
-            <a:avLst/>
-          </a:prstGeom>
-          <a:noFill/>
-        </p:spPr>
-        <p:txBody>
-          <a:bodyPr wrap="square">
-            <a:spAutoFit/>
-          </a:bodyPr>
-          <a:lstStyle/>
-          <a:p>
-            <a:pPr algn="l">
-              <a:spcAft>
-                <a:spcPts val="600"/>
-              </a:spcAft>
-            </a:pPr>
-            <a:r>
-              <a:rPr sz="2800" b="1" i="0">
-                <a:solidFill>
-                  <a:srgbClr val="2C5F2D"/>
-                </a:solidFill>
-                <a:latin typeface="Cambria"/>
-              </a:rPr>
-              <a:t>Bridge into the Exercise</a:t>
-            </a:r>
-          </a:p>
-        </p:txBody>
-      </p:sp>
-      <p:sp>
-        <p:nvSpPr>
-          <p:cNvPr id="4" name="TextBox 4"/>
-          <p:cNvSpPr txBox="1"/>
-          <p:nvPr/>
-        </p:nvSpPr>
-        <p:spPr>
-          <a:xfrm>
-            <a:off x="822960" y="1554480"/>
-            <a:ext cx="10515600" cy="4892040"/>
-          </a:xfrm>
-          <a:prstGeom prst="rect">
-            <a:avLst/>
-          </a:prstGeom>
-          <a:noFill/>
-        </p:spPr>
-        <p:txBody>
-          <a:bodyPr wrap="square" lIns="91440" tIns="91440" rIns="91440" bIns="91440"/>
-          <a:lstStyle/>
-          <a:p>
-            <a:pPr marL="274320" indent="-274320">
-              <a:spcAft>
-                <a:spcPts val="900"/>
-              </a:spcAft>
-            </a:pPr>
-            <a:r>
-              <a:rPr sz="2400" b="1" i="0">
-                <a:solidFill>
-                  <a:srgbClr val="97BC62"/>
-                </a:solidFill>
-                <a:latin typeface="Calibri"/>
-              </a:rPr>
-              <a:t>•  </a:t>
-            </a:r>
-            <a:r>
-              <a:rPr sz="2400" b="0" i="0">
-                <a:solidFill>
-                  <a:srgbClr val="222B22"/>
-                </a:solidFill>
-                <a:latin typeface="Calibri"/>
-              </a:rPr>
-              <a:t>We stay right here, together, as one room — a guided imaginative prayer, twelve to fifteen minutes, read slowly</a:t>
-            </a:r>
-          </a:p>
-          <a:p>
-            <a:pPr marL="274320" indent="-274320">
-              <a:spcAft>
-                <a:spcPts val="900"/>
-              </a:spcAft>
-            </a:pPr>
-            <a:r>
-              <a:rPr sz="2400" b="1" i="0">
-                <a:solidFill>
-                  <a:srgbClr val="97BC62"/>
-                </a:solidFill>
-                <a:latin typeface="Calibri"/>
-              </a:rPr>
-              <a:t>•  </a:t>
-            </a:r>
-            <a:r>
-              <a:rPr sz="2400" b="0" i="0">
-                <a:solidFill>
-                  <a:srgbClr val="222B22"/>
-                </a:solidFill>
-                <a:latin typeface="Calibri"/>
-              </a:rPr>
-              <a:t>Eyes closed or open — either is fine; your own family is beside you the whole time</a:t>
-            </a:r>
-          </a:p>
-          <a:p>
-            <a:pPr marL="274320" indent="-274320">
-              <a:spcAft>
-                <a:spcPts val="900"/>
-              </a:spcAft>
-            </a:pPr>
-            <a:r>
-              <a:rPr sz="2400" b="1" i="0">
-                <a:solidFill>
-                  <a:srgbClr val="97BC62"/>
-                </a:solidFill>
-                <a:latin typeface="Calibri"/>
-              </a:rPr>
-              <a:t>•  </a:t>
-            </a:r>
-            <a:r>
-              <a:rPr sz="2400" b="0" i="0">
-                <a:solidFill>
-                  <a:srgbClr val="222B22"/>
-                </a:solidFill>
-                <a:latin typeface="Calibri"/>
-              </a:rPr>
-              <a:t>Then five minutes with your journal, then pairs for sharing — by invitation only</a:t>
-            </a:r>
-          </a:p>
-          <a:p>
-            <a:pPr marL="274320" indent="-274320">
-              <a:spcAft>
-                <a:spcPts val="900"/>
-              </a:spcAft>
-            </a:pPr>
-            <a:r>
-              <a:rPr sz="2400" b="1" i="0">
-                <a:solidFill>
-                  <a:srgbClr val="97BC62"/>
-                </a:solidFill>
-                <a:latin typeface="Calibri"/>
-              </a:rPr>
-              <a:t>•  </a:t>
-            </a:r>
-            <a:r>
-              <a:rPr sz="2400" b="0" i="0">
-                <a:solidFill>
-                  <a:srgbClr val="222B22"/>
-                </a:solidFill>
-                <a:latin typeface="Calibri"/>
-              </a:rPr>
-              <a:t>A parent will open each round — “Silence is a complete answer.”</a:t>
-            </a:r>
-          </a:p>
-          <a:p>
-            <a:pPr marL="274320" indent="-274320">
-              <a:spcAft>
-                <a:spcPts val="900"/>
-              </a:spcAft>
-            </a:pPr>
-            <a:r>
-              <a:rPr sz="2400" b="1" i="0">
-                <a:solidFill>
-                  <a:srgbClr val="97BC62"/>
-                </a:solidFill>
-                <a:latin typeface="Calibri"/>
-              </a:rPr>
-              <a:t>•  </a:t>
-            </a:r>
-            <a:r>
-              <a:rPr sz="2400" b="0" i="0">
-                <a:solidFill>
-                  <a:srgbClr val="222B22"/>
-                </a:solidFill>
-                <a:latin typeface="Calibri"/>
-              </a:rPr>
-              <a:t>“Father, you are the vinedresser. … Where it is hard, be tender. Where it is closed, be patient. Where it is opening, be present.”</a:t>
-            </a:r>
-          </a:p>
-        </p:txBody>
-      </p:sp>
-      <p:sp>
-        <p:nvSpPr>
-          <p:cNvPr id="90" name="SlideNum"/>
-          <p:cNvSpPr txBox="1"/>
-          <p:nvPr/>
-        </p:nvSpPr>
-        <p:spPr>
-          <a:xfrm>
-            <a:off x="11384280" y="6446520"/>
-            <a:ext cx="640080" cy="292608"/>
-          </a:xfrm>
-          <a:prstGeom prst="rect">
-            <a:avLst/>
-          </a:prstGeom>
-          <a:noFill/>
-        </p:spPr>
-        <p:txBody>
-          <a:bodyPr wrap="none" lIns="0" tIns="0" rIns="45720" bIns="0" anchor="ctr"/>
-          <a:lstStyle/>
-          <a:p>
-            <a:pPr algn="r"/>
-            <a:r>
-              <a:t>119</a:t>
-            </a:r>
-            <a:endParaRPr sz="1000" b="1">
-              <a:solidFill>
-                <a:srgbClr val="7A8A6E"/>
-              </a:solidFill>
-              <a:latin typeface="Calibri"/>
-            </a:endParaRPr>
-          </a:p>
-        </p:txBody>
-      </p:sp>
-    </p:spTree>
-  </p:cSld>
-  <p:clrMapOvr>
-    <a:masterClrMapping/>
-  </p:clrMapOvr>
-</p:sld>
-</file>
-
 <file path=ppt/slides/slide8.xml><?xml version="1.0" encoding="utf-8"?>
 <p:sld xmlns:a="http://schemas.openxmlformats.org/drawingml/2006/main" xmlns:r="http://schemas.openxmlformats.org/officeDocument/2006/relationships" xmlns:p="http://schemas.openxmlformats.org/presentationml/2006/main">
   <p:cSld>
@@ -8490,7 +8490,7 @@
                 </a:solidFill>
                 <a:latin typeface="Cambria"/>
               </a:rPr>
-              <a:t>The Garden Exercise — Whole Room, then pairs</a:t>
+              <a:t>Bridge into the Exercise</a:t>
             </a:r>
           </a:p>
         </p:txBody>
@@ -8515,113 +8515,113 @@
           <a:bodyPr wrap="square" lIns="91440" tIns="91440" rIns="91440" bIns="91440"/>
           <a:lstStyle/>
           <a:p>
-            <a:pPr marL="342900" indent="-342900">
+            <a:pPr marL="274320" indent="-274320">
               <a:spcAft>
-                <a:spcPts val="750"/>
+                <a:spcPts val="900"/>
               </a:spcAft>
             </a:pPr>
             <a:r>
-              <a:rPr sz="2200" b="1" i="0">
+              <a:rPr sz="2400" b="1" i="0">
                 <a:solidFill>
                   <a:srgbClr val="97BC62"/>
                 </a:solidFill>
                 <a:latin typeface="Calibri"/>
               </a:rPr>
-              <a:t>1   </a:t>
-            </a:r>
-            <a:r>
-              <a:rPr sz="2200" b="0" i="0">
+              <a:t>•  </a:t>
+            </a:r>
+            <a:r>
+              <a:rPr sz="2400" b="0" i="0">
                 <a:solidFill>
                   <a:srgbClr val="222B22"/>
                 </a:solidFill>
                 <a:latin typeface="Calibri"/>
               </a:rPr>
-              <a:t>Settle (2 min) — “Take a breath. Settle. Eyes open or closed. Whatever feels honest. We have time.”</a:t>
-            </a:r>
-          </a:p>
-          <a:p>
-            <a:pPr marL="342900" indent="-342900">
+              <a:t>We stay right here, together, as one room — a guided imaginative prayer, twelve to fifteen minutes, read slowly</a:t>
+            </a:r>
+          </a:p>
+          <a:p>
+            <a:pPr marL="274320" indent="-274320">
               <a:spcAft>
-                <a:spcPts val="750"/>
+                <a:spcPts val="900"/>
               </a:spcAft>
             </a:pPr>
             <a:r>
-              <a:rPr sz="2200" b="1" i="0">
+              <a:rPr sz="2400" b="1" i="0">
                 <a:solidFill>
                   <a:srgbClr val="97BC62"/>
                 </a:solidFill>
                 <a:latin typeface="Calibri"/>
               </a:rPr>
-              <a:t>2   </a:t>
-            </a:r>
-            <a:r>
-              <a:rPr sz="2200" b="0" i="0">
+              <a:t>•  </a:t>
+            </a:r>
+            <a:r>
+              <a:rPr sz="2400" b="0" i="0">
                 <a:solidFill>
                   <a:srgbClr val="222B22"/>
                 </a:solidFill>
                 <a:latin typeface="Calibri"/>
               </a:rPr>
-              <a:t>Guided prayer (12–15 min) — read slowly to the whole room; the pauses are not optional — they are where the work happens</a:t>
-            </a:r>
-          </a:p>
-          <a:p>
-            <a:pPr marL="342900" indent="-342900">
+              <a:t>Eyes closed or open — either is fine; your own family is beside you the whole time</a:t>
+            </a:r>
+          </a:p>
+          <a:p>
+            <a:pPr marL="274320" indent="-274320">
               <a:spcAft>
-                <a:spcPts val="750"/>
+                <a:spcPts val="900"/>
               </a:spcAft>
             </a:pPr>
             <a:r>
-              <a:rPr sz="2200" b="1" i="0">
+              <a:rPr sz="2400" b="1" i="0">
                 <a:solidFill>
                   <a:srgbClr val="97BC62"/>
                 </a:solidFill>
                 <a:latin typeface="Calibri"/>
               </a:rPr>
-              <a:t>3   </a:t>
-            </a:r>
-            <a:r>
-              <a:rPr sz="2200" b="0" i="0">
+              <a:t>•  </a:t>
+            </a:r>
+            <a:r>
+              <a:rPr sz="2400" b="0" i="0">
                 <a:solidFill>
                   <a:srgbClr val="222B22"/>
                 </a:solidFill>
                 <a:latin typeface="Calibri"/>
               </a:rPr>
-              <a:t>Silent journaling (5 min) — “Write in your Week 9 journal page what you noticed. Whatever you noticed.”</a:t>
-            </a:r>
-          </a:p>
-          <a:p>
-            <a:pPr marL="342900" indent="-342900">
+              <a:t>Then five minutes with your journal, then pairs for sharing — by invitation only</a:t>
+            </a:r>
+          </a:p>
+          <a:p>
+            <a:pPr marL="274320" indent="-274320">
               <a:spcAft>
-                <a:spcPts val="750"/>
+                <a:spcPts val="900"/>
               </a:spcAft>
             </a:pPr>
             <a:r>
-              <a:rPr sz="2200" b="1" i="0">
+              <a:rPr sz="2400" b="1" i="0">
                 <a:solidFill>
                   <a:srgbClr val="97BC62"/>
                 </a:solidFill>
                 <a:latin typeface="Calibri"/>
               </a:rPr>
-              <a:t>4   </a:t>
-            </a:r>
-            <a:r>
-              <a:rPr sz="2200" b="0" i="0">
+              <a:t>•  </a:t>
+            </a:r>
+            <a:r>
+              <a:rPr sz="2400" b="0" i="0">
                 <a:solidFill>
                   <a:srgbClr val="222B22"/>
                 </a:solidFill>
                 <a:latin typeface="Calibri"/>
               </a:rPr>
-              <a:t>Sharing in pairs (8–10 min) — by invitation only; a parent opens; silence is a complete answer</a:t>
+              <a:t>A parent will open each round — “Silence is a complete answer.”</a:t>
             </a:r>
           </a:p>
           <a:p>
             <a:pPr marL="274320" indent="-274320">
               <a:spcAft>
-                <a:spcPts val="750"/>
+                <a:spcPts val="900"/>
               </a:spcAft>
             </a:pPr>
             <a:r>
-              <a:rPr sz="2200" b="1" i="0">
+              <a:rPr sz="2400" b="1" i="0">
                 <a:solidFill>
                   <a:srgbClr val="97BC62"/>
                 </a:solidFill>
@@ -8630,38 +8630,13 @@
               <a:t>•  </a:t>
             </a:r>
             <a:r>
-              <a:rPr sz="2200" b="0" i="0">
+              <a:rPr sz="2400" b="0" i="0">
                 <a:solidFill>
                   <a:srgbClr val="222B22"/>
                 </a:solidFill>
                 <a:latin typeface="Calibri"/>
               </a:rPr>
-              <a:t>Receive without interpreting — “Thank you for sharing that.” Never “God was telling you _____.”</a:t>
-            </a:r>
-          </a:p>
-          <a:p>
-            <a:pPr marL="274320" indent="-274320">
-              <a:spcAft>
-                <a:spcPts val="750"/>
-              </a:spcAft>
-            </a:pPr>
-            <a:r>
-              <a:rPr sz="2200" b="1" i="0">
-                <a:solidFill>
-                  <a:srgbClr val="97BC62"/>
-                </a:solidFill>
-                <a:latin typeface="Calibri"/>
-              </a:rPr>
-              <a:t>•  </a:t>
-            </a:r>
-            <a:r>
-              <a:rPr sz="2200" b="0" i="0">
-                <a:solidFill>
-                  <a:srgbClr val="222B22"/>
-                </a:solidFill>
-                <a:latin typeface="Calibri"/>
-              </a:rPr>
-              <a:t>If something painful surfaces — bless it: “I hear that. May Jesus stay with you in that place this week.”</a:t>
+              <a:t>“Father, you are the vinedresser. … Where it is hard, be tender. Where it is closed, be patient. Where it is opening, be present.”</a:t>
             </a:r>
           </a:p>
         </p:txBody>
@@ -8688,7 +8663,7 @@
           <a:p>
             <a:pPr algn="r"/>
             <a:r>
-              <a:t>120</a:t>
+              <a:t>119</a:t>
             </a:r>
             <a:endParaRPr sz="1000" b="1">
               <a:solidFill>
@@ -8787,7 +8762,7 @@
                 </a:solidFill>
                 <a:latin typeface="Cambria"/>
               </a:rPr>
-              <a:t>Merge and One-Word Landing</a:t>
+              <a:t>The Garden Exercise — Whole Room, then pairs</a:t>
             </a:r>
           </a:p>
         </p:txBody>
@@ -8812,13 +8787,113 @@
           <a:bodyPr wrap="square" lIns="91440" tIns="91440" rIns="91440" bIns="91440"/>
           <a:lstStyle/>
           <a:p>
+            <a:pPr marL="342900" indent="-342900">
+              <a:spcAft>
+                <a:spcPts val="750"/>
+              </a:spcAft>
+            </a:pPr>
+            <a:r>
+              <a:rPr sz="2200" b="1" i="0">
+                <a:solidFill>
+                  <a:srgbClr val="97BC62"/>
+                </a:solidFill>
+                <a:latin typeface="Calibri"/>
+              </a:rPr>
+              <a:t>1   </a:t>
+            </a:r>
+            <a:r>
+              <a:rPr sz="2200" b="0" i="0">
+                <a:solidFill>
+                  <a:srgbClr val="222B22"/>
+                </a:solidFill>
+                <a:latin typeface="Calibri"/>
+              </a:rPr>
+              <a:t>Settle (2 min) — “Take a breath. Settle. Eyes open or closed. Whatever feels honest. We have time.”</a:t>
+            </a:r>
+          </a:p>
+          <a:p>
+            <a:pPr marL="342900" indent="-342900">
+              <a:spcAft>
+                <a:spcPts val="750"/>
+              </a:spcAft>
+            </a:pPr>
+            <a:r>
+              <a:rPr sz="2200" b="1" i="0">
+                <a:solidFill>
+                  <a:srgbClr val="97BC62"/>
+                </a:solidFill>
+                <a:latin typeface="Calibri"/>
+              </a:rPr>
+              <a:t>2   </a:t>
+            </a:r>
+            <a:r>
+              <a:rPr sz="2200" b="0" i="0">
+                <a:solidFill>
+                  <a:srgbClr val="222B22"/>
+                </a:solidFill>
+                <a:latin typeface="Calibri"/>
+              </a:rPr>
+              <a:t>Guided prayer (12–15 min) — read slowly to the whole room; the pauses are not optional — they are where the work happens</a:t>
+            </a:r>
+          </a:p>
+          <a:p>
+            <a:pPr marL="342900" indent="-342900">
+              <a:spcAft>
+                <a:spcPts val="750"/>
+              </a:spcAft>
+            </a:pPr>
+            <a:r>
+              <a:rPr sz="2200" b="1" i="0">
+                <a:solidFill>
+                  <a:srgbClr val="97BC62"/>
+                </a:solidFill>
+                <a:latin typeface="Calibri"/>
+              </a:rPr>
+              <a:t>3   </a:t>
+            </a:r>
+            <a:r>
+              <a:rPr sz="2200" b="0" i="0">
+                <a:solidFill>
+                  <a:srgbClr val="222B22"/>
+                </a:solidFill>
+                <a:latin typeface="Calibri"/>
+              </a:rPr>
+              <a:t>Silent journaling (5 min) — “Write in your Week 9 journal page what you noticed. Whatever you noticed.”</a:t>
+            </a:r>
+          </a:p>
+          <a:p>
+            <a:pPr marL="342900" indent="-342900">
+              <a:spcAft>
+                <a:spcPts val="750"/>
+              </a:spcAft>
+            </a:pPr>
+            <a:r>
+              <a:rPr sz="2200" b="1" i="0">
+                <a:solidFill>
+                  <a:srgbClr val="97BC62"/>
+                </a:solidFill>
+                <a:latin typeface="Calibri"/>
+              </a:rPr>
+              <a:t>4   </a:t>
+            </a:r>
+            <a:r>
+              <a:rPr sz="2200" b="0" i="0">
+                <a:solidFill>
+                  <a:srgbClr val="222B22"/>
+                </a:solidFill>
+                <a:latin typeface="Calibri"/>
+              </a:rPr>
+              <a:t>Sharing in pairs (8–10 min) — by invitation only; a parent opens; silence is a complete answer</a:t>
+            </a:r>
+          </a:p>
+          <a:p>
             <a:pPr marL="274320" indent="-274320">
               <a:spcAft>
-                <a:spcPts val="900"/>
+                <a:spcPts val="750"/>
               </a:spcAft>
             </a:pPr>
             <a:r>
-              <a:rPr sz="2800" b="1" i="0">
+              <a:rPr sz="2200" b="1" i="0">
                 <a:solidFill>
                   <a:srgbClr val="97BC62"/>
                 </a:solidFill>
@@ -8827,23 +8902,23 @@
               <a:t>•  </a:t>
             </a:r>
             <a:r>
-              <a:rPr sz="2800" b="0" i="0">
+              <a:rPr sz="2200" b="0" i="0">
                 <a:solidFill>
                   <a:srgbClr val="222B22"/>
                 </a:solidFill>
                 <a:latin typeface="Calibri"/>
               </a:rPr>
-              <a:t>“What happened in your pair stays in your pair.”</a:t>
+              <a:t>Receive without interpreting — “Thank you for sharing that.” Never “God was telling you _____.”</a:t>
             </a:r>
           </a:p>
           <a:p>
             <a:pPr marL="274320" indent="-274320">
               <a:spcAft>
-                <a:spcPts val="900"/>
+                <a:spcPts val="750"/>
               </a:spcAft>
             </a:pPr>
             <a:r>
-              <a:rPr sz="2800" b="1" i="0">
+              <a:rPr sz="2200" b="1" i="0">
                 <a:solidFill>
                   <a:srgbClr val="97BC62"/>
                 </a:solidFill>
@@ -8852,88 +8927,13 @@
               <a:t>•  </a:t>
             </a:r>
             <a:r>
-              <a:rPr sz="2800" b="0" i="0">
+              <a:rPr sz="2200" b="0" i="0">
                 <a:solidFill>
                   <a:srgbClr val="222B22"/>
                 </a:solidFill>
                 <a:latin typeface="Calibri"/>
               </a:rPr>
-              <a:t>One word about tonight — not what was said, but what you noticed</a:t>
-            </a:r>
-          </a:p>
-          <a:p>
-            <a:pPr marL="685800" indent="-274320">
-              <a:spcAft>
-                <a:spcPts val="700"/>
-              </a:spcAft>
-            </a:pPr>
-            <a:r>
-              <a:rPr sz="2000" b="1" i="0">
-                <a:solidFill>
-                  <a:srgbClr val="97BC62"/>
-                </a:solidFill>
-                <a:latin typeface="Calibri"/>
-              </a:rPr>
-              <a:t>–  </a:t>
-            </a:r>
-            <a:r>
-              <a:rPr sz="2000" b="0" i="1">
-                <a:solidFill>
-                  <a:srgbClr val="222B22"/>
-                </a:solidFill>
-                <a:latin typeface="Calibri"/>
-              </a:rPr>
-              <a:t>“Surprised.” “Tender.” “Empty.” “Found.” “Confused.” “Quiet.”</a:t>
-            </a:r>
-          </a:p>
-          <a:p>
-            <a:pPr marL="274320" indent="-274320">
-              <a:spcAft>
-                <a:spcPts val="900"/>
-              </a:spcAft>
-            </a:pPr>
-            <a:r>
-              <a:rPr sz="2800" b="1" i="0">
-                <a:solidFill>
-                  <a:srgbClr val="97BC62"/>
-                </a:solidFill>
-                <a:latin typeface="Calibri"/>
-              </a:rPr>
-              <a:t>•  </a:t>
-            </a:r>
-            <a:r>
-              <a:rPr sz="2800" b="0" i="0">
-                <a:solidFill>
-                  <a:srgbClr val="222B22"/>
-                </a:solidFill>
-                <a:latin typeface="Calibri"/>
-              </a:rPr>
-              <a:t>A parent begins; anyone may pass — each word received without commentary</a:t>
-            </a:r>
-          </a:p>
-          <a:p>
-            <a:pPr marL="274320" indent="-274320">
-              <a:spcAft>
-                <a:spcPts val="900"/>
-              </a:spcAft>
-            </a:pPr>
-            <a:r>
-              <a:rPr sz="2800" b="1" i="0">
-                <a:solidFill>
-                  <a:srgbClr val="97BC62"/>
-                </a:solidFill>
-                <a:latin typeface="Calibri"/>
-              </a:rPr>
-              <a:t>•  </a:t>
-            </a:r>
-            <a:r>
-              <a:rPr sz="2800" b="0" i="0">
-                <a:solidFill>
-                  <a:srgbClr val="222B22"/>
-                </a:solidFill>
-                <a:latin typeface="Calibri"/>
-              </a:rPr>
-              <a:t>“Whatever happened tonight is yours. Some of it will keep happening across the week.”</a:t>
+              <a:t>If something painful surfaces — bless it: “I hear that. May Jesus stay with you in that place this week.”</a:t>
             </a:r>
           </a:p>
         </p:txBody>
@@ -8960,7 +8960,7 @@
           <a:p>
             <a:pPr algn="r"/>
             <a:r>
-              <a:t>121</a:t>
+              <a:t>120</a:t>
             </a:r>
             <a:endParaRPr sz="1000" b="1">
               <a:solidFill>

--- a/_implementation-notes/evening-series/FotH Evening Session 9 Slides DRAFT v1.pptx
+++ b/_implementation-notes/evening-series/FotH Evening Session 9 Slides DRAFT v1.pptx
@@ -6943,7 +6943,7 @@
           <p:nvPr/>
         </p:nvPicPr>
         <p:blipFill>
-          <a:blip r:embed="rId4"/>
+          <a:blip r:embed="rId5"/>
           <a:stretch>
             <a:fillRect/>
           </a:stretch>

--- a/_implementation-notes/evening-series/FotH Evening Session 9 Slides DRAFT v1.pptx
+++ b/_implementation-notes/evening-series/FotH Evening Session 9 Slides DRAFT v1.pptx
@@ -5034,7 +5034,7 @@
           <a:p>
             <a:pPr algn="r"/>
             <a:r>
-              <a:t>121</a:t>
+              <a:t>138</a:t>
             </a:r>
             <a:endParaRPr sz="1000" b="1">
               <a:solidFill>
@@ -5331,7 +5331,7 @@
           <a:p>
             <a:pPr algn="r"/>
             <a:r>
-              <a:t>122</a:t>
+              <a:t>139</a:t>
             </a:r>
             <a:endParaRPr sz="1000" b="1">
               <a:solidFill>
@@ -5559,7 +5559,7 @@
           <a:p>
             <a:pPr algn="r"/>
             <a:r>
-              <a:t>123</a:t>
+              <a:t>140</a:t>
             </a:r>
             <a:endParaRPr sz="1000" b="1">
               <a:solidFill>
@@ -5751,7 +5751,7 @@
           <a:p>
             <a:pPr algn="r"/>
             <a:r>
-              <a:t>123a</a:t>
+              <a:t>141</a:t>
             </a:r>
             <a:endParaRPr sz="1000" b="1">
               <a:solidFill>
@@ -6048,7 +6048,7 @@
           <a:p>
             <a:pPr algn="r"/>
             <a:r>
-              <a:t>124</a:t>
+              <a:t>142</a:t>
             </a:r>
             <a:endParaRPr sz="1000" b="1">
               <a:solidFill>
@@ -6493,7 +6493,7 @@
           <a:p>
             <a:pPr algn="r"/>
             <a:r>
-              <a:t>125</a:t>
+              <a:t>143</a:t>
             </a:r>
             <a:endParaRPr sz="1000" b="1">
               <a:solidFill>
@@ -6742,7 +6742,7 @@
           <a:p>
             <a:pPr algn="r"/>
             <a:r>
-              <a:t>114</a:t>
+              <a:t>130</a:t>
             </a:r>
             <a:endParaRPr sz="1000" b="1">
               <a:solidFill>
@@ -6923,7 +6923,7 @@
           <a:p>
             <a:pPr algn="r"/>
             <a:r>
-              <a:t>114a</a:t>
+              <a:t>131</a:t>
             </a:r>
             <a:endParaRPr sz="1000" b="1">
               <a:solidFill>
@@ -7337,7 +7337,7 @@
           <a:p>
             <a:pPr algn="r"/>
             <a:r>
-              <a:t>115</a:t>
+              <a:t>132</a:t>
             </a:r>
             <a:endParaRPr sz="1000" b="1">
               <a:solidFill>
@@ -7720,7 +7720,7 @@
           <a:p>
             <a:pPr algn="r"/>
             <a:r>
-              <a:t>116</a:t>
+              <a:t>133</a:t>
             </a:r>
             <a:endParaRPr sz="1000" b="1">
               <a:solidFill>
@@ -7967,7 +7967,7 @@
           <a:p>
             <a:pPr algn="r"/>
             <a:r>
-              <a:t>117</a:t>
+              <a:t>134</a:t>
             </a:r>
             <a:endParaRPr sz="1000" b="1">
               <a:solidFill>
@@ -8355,7 +8355,7 @@
           <a:p>
             <a:pPr algn="r"/>
             <a:r>
-              <a:t>118</a:t>
+              <a:t>135</a:t>
             </a:r>
             <a:endParaRPr sz="1000" b="1">
               <a:solidFill>
@@ -8663,7 +8663,7 @@
           <a:p>
             <a:pPr algn="r"/>
             <a:r>
-              <a:t>119</a:t>
+              <a:t>136</a:t>
             </a:r>
             <a:endParaRPr sz="1000" b="1">
               <a:solidFill>
@@ -8960,7 +8960,7 @@
           <a:p>
             <a:pPr algn="r"/>
             <a:r>
-              <a:t>120</a:t>
+              <a:t>137</a:t>
             </a:r>
             <a:endParaRPr sz="1000" b="1">
               <a:solidFill>

--- a/_implementation-notes/evening-series/FotH Evening Session 9 Slides DRAFT v1.pptx
+++ b/_implementation-notes/evening-series/FotH Evening Session 9 Slides DRAFT v1.pptx
@@ -6943,7 +6943,7 @@
           <p:nvPr/>
         </p:nvPicPr>
         <p:blipFill>
-          <a:blip r:embed="rId5"/>
+          <a:blip r:embed="rId6"/>
           <a:stretch>
             <a:fillRect/>
           </a:stretch>

--- a/_implementation-notes/evening-series/FotH Evening Session 9 Slides DRAFT v1.pptx
+++ b/_implementation-notes/evening-series/FotH Evening Session 9 Slides DRAFT v1.pptx
@@ -1184,7 +1184,7 @@
           <a:p>
             <a:r>
               <a:rPr lang="en-US" sz="1200"/>
-              <a:t>S9 · 8:14–8:20 · LEAD: CONTENT PRESENTER</a:t>
+              <a:t>S9 · 8:14–8:20 · LEAD: CONTAINER HOLDER</a:t>
             </a:r>
           </a:p>
           <a:p>

--- a/_implementation-notes/evening-series/FotH Evening Session 9 Slides DRAFT v1.pptx
+++ b/_implementation-notes/evening-series/FotH Evening Session 9 Slides DRAFT v1.pptx
@@ -5034,7 +5034,7 @@
           <a:p>
             <a:pPr algn="r"/>
             <a:r>
-              <a:t>138</a:t>
+              <a:t>139</a:t>
             </a:r>
             <a:endParaRPr sz="1000" b="1">
               <a:solidFill>
@@ -5331,7 +5331,7 @@
           <a:p>
             <a:pPr algn="r"/>
             <a:r>
-              <a:t>139</a:t>
+              <a:t>140</a:t>
             </a:r>
             <a:endParaRPr sz="1000" b="1">
               <a:solidFill>
@@ -5559,7 +5559,7 @@
           <a:p>
             <a:pPr algn="r"/>
             <a:r>
-              <a:t>140</a:t>
+              <a:t>141</a:t>
             </a:r>
             <a:endParaRPr sz="1000" b="1">
               <a:solidFill>
@@ -5751,7 +5751,7 @@
           <a:p>
             <a:pPr algn="r"/>
             <a:r>
-              <a:t>141</a:t>
+              <a:t>142</a:t>
             </a:r>
             <a:endParaRPr sz="1000" b="1">
               <a:solidFill>
@@ -6048,7 +6048,7 @@
           <a:p>
             <a:pPr algn="r"/>
             <a:r>
-              <a:t>142</a:t>
+              <a:t>143</a:t>
             </a:r>
             <a:endParaRPr sz="1000" b="1">
               <a:solidFill>
@@ -6493,7 +6493,7 @@
           <a:p>
             <a:pPr algn="r"/>
             <a:r>
-              <a:t>143</a:t>
+              <a:t>144</a:t>
             </a:r>
             <a:endParaRPr sz="1000" b="1">
               <a:solidFill>
@@ -6742,7 +6742,7 @@
           <a:p>
             <a:pPr algn="r"/>
             <a:r>
-              <a:t>130</a:t>
+              <a:t>131</a:t>
             </a:r>
             <a:endParaRPr sz="1000" b="1">
               <a:solidFill>
@@ -6923,7 +6923,7 @@
           <a:p>
             <a:pPr algn="r"/>
             <a:r>
-              <a:t>131</a:t>
+              <a:t>132</a:t>
             </a:r>
             <a:endParaRPr sz="1000" b="1">
               <a:solidFill>
@@ -7337,7 +7337,7 @@
           <a:p>
             <a:pPr algn="r"/>
             <a:r>
-              <a:t>132</a:t>
+              <a:t>133</a:t>
             </a:r>
             <a:endParaRPr sz="1000" b="1">
               <a:solidFill>
@@ -7720,7 +7720,7 @@
           <a:p>
             <a:pPr algn="r"/>
             <a:r>
-              <a:t>133</a:t>
+              <a:t>134</a:t>
             </a:r>
             <a:endParaRPr sz="1000" b="1">
               <a:solidFill>
@@ -7967,7 +7967,7 @@
           <a:p>
             <a:pPr algn="r"/>
             <a:r>
-              <a:t>134</a:t>
+              <a:t>135</a:t>
             </a:r>
             <a:endParaRPr sz="1000" b="1">
               <a:solidFill>
@@ -8355,7 +8355,7 @@
           <a:p>
             <a:pPr algn="r"/>
             <a:r>
-              <a:t>135</a:t>
+              <a:t>136</a:t>
             </a:r>
             <a:endParaRPr sz="1000" b="1">
               <a:solidFill>
@@ -8663,7 +8663,7 @@
           <a:p>
             <a:pPr algn="r"/>
             <a:r>
-              <a:t>136</a:t>
+              <a:t>137</a:t>
             </a:r>
             <a:endParaRPr sz="1000" b="1">
               <a:solidFill>
@@ -8960,7 +8960,7 @@
           <a:p>
             <a:pPr algn="r"/>
             <a:r>
-              <a:t>137</a:t>
+              <a:t>138</a:t>
             </a:r>
             <a:endParaRPr sz="1000" b="1">
               <a:solidFill>

--- a/_implementation-notes/evening-series/FotH Evening Session 9 Slides DRAFT v1.pptx
+++ b/_implementation-notes/evening-series/FotH Evening Session 9 Slides DRAFT v1.pptx
@@ -1348,20 +1348,22 @@
           <a:lstStyle/>
           <a:p>
             <a:r>
-              <a:rPr lang="en-US" sz="1200"/>
               <a:t>S9 · 8:28–8:30 · LEAD: CONTAINER HOLDER</a:t>
             </a:r>
           </a:p>
           <a:p>
             <a:r>
-              <a:rPr lang="en-US" sz="1200"/>
               <a:t>BEATS: 1. 'What happened in your pair is yours. Carry it gently — don't debrief it on the way home unless your heart is fully ready.' 2. If something heavy surfaced, reach out — the team is walking with you. 3. Aaronic blessing; see you evenings.</a:t>
             </a:r>
           </a:p>
           <a:p>
             <a:r>
-              <a:rPr lang="en-US" sz="1200"/>
               <a:t>CUES: Stay accessible for fifteen minutes after the close — today more than most, people will want to talk; the two-adult rule holds for any teen.</a:t>
+            </a:r>
+          </a:p>
+          <a:p>
+            <a:r>
+              <a:t>BLESSINGS: eyes on the person, not the screen — nothing to read; say what is on your heart for them, specific and short.</a:t>
             </a:r>
           </a:p>
         </p:txBody>
@@ -6354,7 +6356,7 @@
                 </a:solidFill>
                 <a:latin typeface="Calibri"/>
               </a:rPr>
-              <a:t>Blessings — specific, witnessed, short</a:t>
+              <a:t>Blessings — eyes on the person, not the screen: say what is on your heart for them. Specific, witnessed, short</a:t>
             </a:r>
           </a:p>
           <a:p>
